--- a/decks/deployment-strategies/deployment-strategies.pptx
+++ b/decks/deployment-strategies/deployment-strategies.pptx
@@ -1210,6 +1210,13 @@
 <file path=ppt/slides/slide1.xml><?xml version="1.0" encoding="utf-8"?>
 <p:sld xmlns:a="http://schemas.openxmlformats.org/drawingml/2006/main" xmlns:r="http://schemas.openxmlformats.org/officeDocument/2006/relationships" xmlns:p="http://schemas.openxmlformats.org/presentationml/2006/main">
   <p:cSld name="Slide 1">
+    <p:bg>
+      <p:bgPr>
+        <a:solidFill>
+          <a:srgbClr val="FFFFFF"/>
+        </a:solidFill>
+      </p:bgPr>
+    </p:bg>
     <p:spTree>
       <p:nvGrpSpPr>
         <p:cNvPr id="1" name=""/>
@@ -1224,30 +1231,659 @@
           <a:chExt cx="0" cy="0"/>
         </a:xfrm>
       </p:grpSpPr>
-      <p:pic>
-        <p:nvPicPr>
-          <p:cNvPr id="2" name="Image 0" descr="/tmp/slide-1787840594125-qj0xhbvfft.png">    </p:cNvPr>
-          <p:cNvPicPr>
-            <a:picLocks noChangeAspect="1"/>
-          </p:cNvPicPr>
-          <p:nvPr/>
-        </p:nvPicPr>
-        <p:blipFill>
-          <a:blip r:embed="rId1"/>
-          <a:stretch>
-            <a:fillRect/>
-          </a:stretch>
-        </p:blipFill>
-        <p:spPr>
-          <a:xfrm>
-            <a:off x="0" y="0"/>
-            <a:ext cx="12188952" cy="6858000"/>
-          </a:xfrm>
-          <a:prstGeom prst="rect">
-            <a:avLst/>
-          </a:prstGeom>
-        </p:spPr>
-      </p:pic>
+      <p:sp>
+        <p:nvSpPr>
+          <p:cNvPr id="2" name="Text 0"/>
+          <p:cNvSpPr/>
+          <p:nvPr/>
+        </p:nvSpPr>
+        <p:spPr>
+          <a:xfrm>
+            <a:off x="406298" y="406400"/>
+            <a:ext cx="7059435" cy="4088408"/>
+          </a:xfrm>
+          <a:prstGeom prst="rect">
+            <a:avLst/>
+          </a:prstGeom>
+          <a:solidFill>
+            <a:srgbClr val="2A2D34"/>
+          </a:solidFill>
+          <a:ln/>
+        </p:spPr>
+        <p:txBody>
+          <a:bodyPr wrap="square" rtlCol="0" anchor="ctr"/>
+          <a:lstStyle/>
+          <a:p>
+            <a:pPr indent="0" marL="0">
+              <a:buNone/>
+            </a:pPr>
+            <a:endParaRPr lang="en-US" dirty="0"/>
+          </a:p>
+        </p:txBody>
+      </p:sp>
+      <p:sp>
+        <p:nvSpPr>
+          <p:cNvPr id="3" name="Text 1"/>
+          <p:cNvSpPr/>
+          <p:nvPr/>
+        </p:nvSpPr>
+        <p:spPr>
+          <a:xfrm>
+            <a:off x="880247" y="880467"/>
+            <a:ext cx="6233768" cy="236934"/>
+          </a:xfrm>
+          <a:prstGeom prst="rect">
+            <a:avLst/>
+          </a:prstGeom>
+          <a:noFill/>
+          <a:ln/>
+        </p:spPr>
+        <p:txBody>
+          <a:bodyPr wrap="square" lIns="0" tIns="0" rIns="0" bIns="0" rtlCol="0" anchor="t"/>
+          <a:lstStyle/>
+          <a:p>
+            <a:pPr algn="l" indent="0" marL="0">
+              <a:lnSpc>
+                <a:spcPts val="1866"/>
+              </a:lnSpc>
+              <a:buNone/>
+            </a:pPr>
+            <a:r>
+              <a:rPr lang="en-US" sz="1333" b="1" dirty="0">
+                <a:solidFill>
+                  <a:srgbClr val="E8A317"/>
+                </a:solidFill>
+                <a:latin typeface="Inter" pitchFamily="34" charset="0"/>
+                <a:ea typeface="Inter" pitchFamily="34" charset="-122"/>
+                <a:cs typeface="Inter" pitchFamily="34" charset="-120"/>
+              </a:rPr>
+              <a:t>RELEASE ENGINEERING · PLATFORM</a:t>
+            </a:r>
+            <a:endParaRPr lang="en-US" sz="1333" dirty="0"/>
+          </a:p>
+        </p:txBody>
+      </p:sp>
+      <p:sp>
+        <p:nvSpPr>
+          <p:cNvPr id="4" name="Text 2"/>
+          <p:cNvSpPr/>
+          <p:nvPr/>
+        </p:nvSpPr>
+        <p:spPr>
+          <a:xfrm>
+            <a:off x="880247" y="1286669"/>
+            <a:ext cx="6233768" cy="1625203"/>
+          </a:xfrm>
+          <a:prstGeom prst="rect">
+            <a:avLst/>
+          </a:prstGeom>
+          <a:noFill/>
+          <a:ln/>
+        </p:spPr>
+        <p:txBody>
+          <a:bodyPr wrap="square" lIns="0" tIns="0" rIns="0" bIns="0" rtlCol="0" anchor="t"/>
+          <a:lstStyle/>
+          <a:p>
+            <a:pPr algn="l" indent="0" marL="0">
+              <a:lnSpc>
+                <a:spcPts val="6399"/>
+              </a:lnSpc>
+              <a:spcBef>
+                <a:spcPts val="1333"/>
+              </a:spcBef>
+              <a:buNone/>
+            </a:pPr>
+            <a:r>
+              <a:rPr lang="en-US" sz="5333" dirty="0">
+                <a:solidFill>
+                  <a:srgbClr val="FFFFFF"/>
+                </a:solidFill>
+                <a:latin typeface="Archivo" pitchFamily="34" charset="0"/>
+                <a:ea typeface="Archivo" pitchFamily="34" charset="-122"/>
+                <a:cs typeface="Archivo" pitchFamily="34" charset="-120"/>
+              </a:rPr>
+              <a:t>Deployment</a:t>
+            </a:r>
+            <a:endParaRPr lang="en-US" sz="5333" dirty="0"/>
+          </a:p>
+          <a:p>
+            <a:pPr algn="l" indent="0" marL="0">
+              <a:lnSpc>
+                <a:spcPts val="6399"/>
+              </a:lnSpc>
+              <a:spcBef>
+                <a:spcPts val="1333"/>
+              </a:spcBef>
+              <a:buNone/>
+            </a:pPr>
+            <a:r>
+              <a:rPr lang="en-US" sz="5333" dirty="0">
+                <a:solidFill>
+                  <a:srgbClr val="FFFFFF"/>
+                </a:solidFill>
+                <a:latin typeface="Archivo" pitchFamily="34" charset="0"/>
+                <a:ea typeface="Archivo" pitchFamily="34" charset="-122"/>
+                <a:cs typeface="Archivo" pitchFamily="34" charset="-120"/>
+              </a:rPr>
+              <a:t>strategies</a:t>
+            </a:r>
+            <a:endParaRPr lang="en-US" sz="5333" dirty="0"/>
+          </a:p>
+        </p:txBody>
+      </p:sp>
+      <p:sp>
+        <p:nvSpPr>
+          <p:cNvPr id="5" name="Text 3"/>
+          <p:cNvSpPr/>
+          <p:nvPr/>
+        </p:nvSpPr>
+        <p:spPr>
+          <a:xfrm>
+            <a:off x="880247" y="3115072"/>
+            <a:ext cx="6233768" cy="343694"/>
+          </a:xfrm>
+          <a:prstGeom prst="rect">
+            <a:avLst/>
+          </a:prstGeom>
+          <a:noFill/>
+          <a:ln/>
+        </p:spPr>
+        <p:txBody>
+          <a:bodyPr wrap="square" lIns="0" tIns="0" rIns="0" bIns="0" rtlCol="0" anchor="t"/>
+          <a:lstStyle/>
+          <a:p>
+            <a:pPr algn="l" indent="0" marL="0">
+              <a:lnSpc>
+                <a:spcPts val="2706"/>
+              </a:lnSpc>
+              <a:spcBef>
+                <a:spcPts val="1600"/>
+              </a:spcBef>
+              <a:buNone/>
+            </a:pPr>
+            <a:r>
+              <a:rPr lang="en-US" sz="1866" b="1" dirty="0">
+                <a:solidFill>
+                  <a:srgbClr val="FFFFFF"/>
+                </a:solidFill>
+                <a:latin typeface="Inter" pitchFamily="34" charset="0"/>
+                <a:ea typeface="Inter" pitchFamily="34" charset="-122"/>
+                <a:cs typeface="Inter" pitchFamily="34" charset="-120"/>
+              </a:rPr>
+              <a:t>Rolling · Blue-green · Canary</a:t>
+            </a:r>
+            <a:endParaRPr lang="en-US" sz="1866" dirty="0"/>
+          </a:p>
+        </p:txBody>
+      </p:sp>
+      <p:sp>
+        <p:nvSpPr>
+          <p:cNvPr id="6" name="Text 4"/>
+          <p:cNvSpPr/>
+          <p:nvPr/>
+        </p:nvSpPr>
+        <p:spPr>
+          <a:xfrm>
+            <a:off x="880247" y="3783806"/>
+            <a:ext cx="6233768" cy="236934"/>
+          </a:xfrm>
+          <a:prstGeom prst="rect">
+            <a:avLst/>
+          </a:prstGeom>
+          <a:noFill/>
+          <a:ln/>
+        </p:spPr>
+        <p:txBody>
+          <a:bodyPr wrap="square" lIns="0" tIns="0" rIns="0" bIns="0" rtlCol="0" anchor="t"/>
+          <a:lstStyle/>
+          <a:p>
+            <a:pPr algn="l" indent="0" marL="0">
+              <a:lnSpc>
+                <a:spcPts val="1866"/>
+              </a:lnSpc>
+              <a:spcBef>
+                <a:spcPts val="2559"/>
+              </a:spcBef>
+              <a:buNone/>
+            </a:pPr>
+            <a:r>
+              <a:rPr lang="en-US" sz="1333" b="1" dirty="0">
+                <a:solidFill>
+                  <a:srgbClr val="FFFFFF"/>
+                </a:solidFill>
+                <a:latin typeface="Inter" pitchFamily="34" charset="0"/>
+                <a:ea typeface="Inter" pitchFamily="34" charset="-122"/>
+                <a:cs typeface="Inter" pitchFamily="34" charset="-120"/>
+              </a:rPr>
+              <a:t>PRESENTER · TEAM</a:t>
+            </a:r>
+            <a:endParaRPr lang="en-US" sz="1333" dirty="0"/>
+          </a:p>
+        </p:txBody>
+      </p:sp>
+      <p:sp>
+        <p:nvSpPr>
+          <p:cNvPr id="7" name="Text 5"/>
+          <p:cNvSpPr/>
+          <p:nvPr/>
+        </p:nvSpPr>
+        <p:spPr>
+          <a:xfrm>
+            <a:off x="406298" y="4596408"/>
+            <a:ext cx="7059435" cy="1855192"/>
+          </a:xfrm>
+          <a:prstGeom prst="rect">
+            <a:avLst/>
+          </a:prstGeom>
+          <a:solidFill>
+            <a:srgbClr val="E8A317"/>
+          </a:solidFill>
+          <a:ln/>
+        </p:spPr>
+        <p:txBody>
+          <a:bodyPr wrap="square" rtlCol="0" anchor="ctr"/>
+          <a:lstStyle/>
+          <a:p>
+            <a:pPr indent="0" marL="0">
+              <a:buNone/>
+            </a:pPr>
+            <a:endParaRPr lang="en-US" dirty="0"/>
+          </a:p>
+        </p:txBody>
+      </p:sp>
+      <p:sp>
+        <p:nvSpPr>
+          <p:cNvPr id="8" name="Text 6"/>
+          <p:cNvSpPr/>
+          <p:nvPr/>
+        </p:nvSpPr>
+        <p:spPr>
+          <a:xfrm>
+            <a:off x="744748" y="4934942"/>
+            <a:ext cx="6510186" cy="1178123"/>
+          </a:xfrm>
+          <a:prstGeom prst="rect">
+            <a:avLst/>
+          </a:prstGeom>
+          <a:noFill/>
+          <a:ln/>
+        </p:spPr>
+        <p:txBody>
+          <a:bodyPr wrap="square" lIns="0" tIns="0" rIns="0" bIns="0" rtlCol="0" anchor="t"/>
+          <a:lstStyle/>
+          <a:p>
+            <a:pPr algn="l" indent="0" marL="0">
+              <a:lnSpc>
+                <a:spcPts val="3093"/>
+              </a:lnSpc>
+              <a:buNone/>
+            </a:pPr>
+            <a:r>
+              <a:rPr lang="en-US" sz="2133" b="1" dirty="0">
+                <a:solidFill>
+                  <a:srgbClr val="2A2D34"/>
+                </a:solidFill>
+                <a:latin typeface="Inter" pitchFamily="34" charset="0"/>
+                <a:ea typeface="Inter" pitchFamily="34" charset="-122"/>
+                <a:cs typeface="Inter" pitchFamily="34" charset="-120"/>
+              </a:rPr>
+              <a:t>The strategy is not a matter of taste. It is decided by how fast you must be able to roll back, and by whether your traffic can be split.</a:t>
+            </a:r>
+            <a:endParaRPr lang="en-US" sz="2133" dirty="0"/>
+          </a:p>
+        </p:txBody>
+      </p:sp>
+      <p:sp>
+        <p:nvSpPr>
+          <p:cNvPr id="9" name="Text 7"/>
+          <p:cNvSpPr/>
+          <p:nvPr/>
+        </p:nvSpPr>
+        <p:spPr>
+          <a:xfrm>
+            <a:off x="7567308" y="406400"/>
+            <a:ext cx="4215346" cy="1947267"/>
+          </a:xfrm>
+          <a:prstGeom prst="rect">
+            <a:avLst/>
+          </a:prstGeom>
+          <a:solidFill>
+            <a:srgbClr val="1F8A82"/>
+          </a:solidFill>
+          <a:ln/>
+        </p:spPr>
+        <p:txBody>
+          <a:bodyPr wrap="square" rtlCol="0" anchor="ctr"/>
+          <a:lstStyle/>
+          <a:p>
+            <a:pPr indent="0" marL="0">
+              <a:buNone/>
+            </a:pPr>
+            <a:endParaRPr lang="en-US" dirty="0"/>
+          </a:p>
+        </p:txBody>
+      </p:sp>
+      <p:sp>
+        <p:nvSpPr>
+          <p:cNvPr id="10" name="Text 8"/>
+          <p:cNvSpPr/>
+          <p:nvPr/>
+        </p:nvSpPr>
+        <p:spPr>
+          <a:xfrm>
+            <a:off x="7872031" y="851694"/>
+            <a:ext cx="3678016" cy="690761"/>
+          </a:xfrm>
+          <a:prstGeom prst="rect">
+            <a:avLst/>
+          </a:prstGeom>
+          <a:noFill/>
+          <a:ln/>
+        </p:spPr>
+        <p:txBody>
+          <a:bodyPr wrap="square" lIns="0" tIns="0" rIns="0" bIns="0" rtlCol="0" anchor="t"/>
+          <a:lstStyle/>
+          <a:p>
+            <a:pPr algn="l" indent="0" marL="0">
+              <a:lnSpc>
+                <a:spcPts val="5439"/>
+              </a:lnSpc>
+              <a:buNone/>
+            </a:pPr>
+            <a:r>
+              <a:rPr lang="en-US" sz="4533" b="1" dirty="0">
+                <a:solidFill>
+                  <a:srgbClr val="FFFFFF"/>
+                </a:solidFill>
+                <a:latin typeface="Archivo" pitchFamily="34" charset="0"/>
+                <a:ea typeface="Archivo" pitchFamily="34" charset="-122"/>
+                <a:cs typeface="Archivo" pitchFamily="34" charset="-120"/>
+              </a:rPr>
+              <a:t>01</a:t>
+            </a:r>
+            <a:endParaRPr lang="en-US" sz="4533" dirty="0"/>
+          </a:p>
+        </p:txBody>
+      </p:sp>
+      <p:sp>
+        <p:nvSpPr>
+          <p:cNvPr id="11" name="Text 9"/>
+          <p:cNvSpPr/>
+          <p:nvPr/>
+        </p:nvSpPr>
+        <p:spPr>
+          <a:xfrm>
+            <a:off x="7872031" y="1576189"/>
+            <a:ext cx="3678016" cy="331986"/>
+          </a:xfrm>
+          <a:prstGeom prst="rect">
+            <a:avLst/>
+          </a:prstGeom>
+          <a:noFill/>
+          <a:ln/>
+        </p:spPr>
+        <p:txBody>
+          <a:bodyPr wrap="square" lIns="0" tIns="0" rIns="0" bIns="0" rtlCol="0" anchor="t"/>
+          <a:lstStyle/>
+          <a:p>
+            <a:pPr algn="l" indent="0" marL="0">
+              <a:lnSpc>
+                <a:spcPts val="2613"/>
+              </a:lnSpc>
+              <a:spcBef>
+                <a:spcPts val="267"/>
+              </a:spcBef>
+              <a:buNone/>
+            </a:pPr>
+            <a:r>
+              <a:rPr lang="en-US" sz="1866" b="1" dirty="0">
+                <a:solidFill>
+                  <a:srgbClr val="FFFFFF"/>
+                </a:solidFill>
+                <a:latin typeface="Inter" pitchFamily="34" charset="0"/>
+                <a:ea typeface="Inter" pitchFamily="34" charset="-122"/>
+                <a:cs typeface="Inter" pitchFamily="34" charset="-120"/>
+              </a:rPr>
+              <a:t>ROLLING</a:t>
+            </a:r>
+            <a:endParaRPr lang="en-US" sz="1866" dirty="0"/>
+          </a:p>
+        </p:txBody>
+      </p:sp>
+      <p:sp>
+        <p:nvSpPr>
+          <p:cNvPr id="12" name="Text 10"/>
+          <p:cNvSpPr/>
+          <p:nvPr/>
+        </p:nvSpPr>
+        <p:spPr>
+          <a:xfrm>
+            <a:off x="7567308" y="2455267"/>
+            <a:ext cx="4215346" cy="1947267"/>
+          </a:xfrm>
+          <a:prstGeom prst="rect">
+            <a:avLst/>
+          </a:prstGeom>
+          <a:solidFill>
+            <a:srgbClr val="2A2D34"/>
+          </a:solidFill>
+          <a:ln/>
+        </p:spPr>
+        <p:txBody>
+          <a:bodyPr wrap="square" rtlCol="0" anchor="ctr"/>
+          <a:lstStyle/>
+          <a:p>
+            <a:pPr indent="0" marL="0">
+              <a:buNone/>
+            </a:pPr>
+            <a:endParaRPr lang="en-US" dirty="0"/>
+          </a:p>
+        </p:txBody>
+      </p:sp>
+      <p:sp>
+        <p:nvSpPr>
+          <p:cNvPr id="13" name="Text 11"/>
+          <p:cNvSpPr/>
+          <p:nvPr/>
+        </p:nvSpPr>
+        <p:spPr>
+          <a:xfrm>
+            <a:off x="7872031" y="2900561"/>
+            <a:ext cx="3678016" cy="690761"/>
+          </a:xfrm>
+          <a:prstGeom prst="rect">
+            <a:avLst/>
+          </a:prstGeom>
+          <a:noFill/>
+          <a:ln/>
+        </p:spPr>
+        <p:txBody>
+          <a:bodyPr wrap="square" lIns="0" tIns="0" rIns="0" bIns="0" rtlCol="0" anchor="t"/>
+          <a:lstStyle/>
+          <a:p>
+            <a:pPr algn="l" indent="0" marL="0">
+              <a:lnSpc>
+                <a:spcPts val="5439"/>
+              </a:lnSpc>
+              <a:buNone/>
+            </a:pPr>
+            <a:r>
+              <a:rPr lang="en-US" sz="4533" b="1" dirty="0">
+                <a:solidFill>
+                  <a:srgbClr val="FFFFFF"/>
+                </a:solidFill>
+                <a:latin typeface="Archivo" pitchFamily="34" charset="0"/>
+                <a:ea typeface="Archivo" pitchFamily="34" charset="-122"/>
+                <a:cs typeface="Archivo" pitchFamily="34" charset="-120"/>
+              </a:rPr>
+              <a:t>02</a:t>
+            </a:r>
+            <a:endParaRPr lang="en-US" sz="4533" dirty="0"/>
+          </a:p>
+        </p:txBody>
+      </p:sp>
+      <p:sp>
+        <p:nvSpPr>
+          <p:cNvPr id="14" name="Text 12"/>
+          <p:cNvSpPr/>
+          <p:nvPr/>
+        </p:nvSpPr>
+        <p:spPr>
+          <a:xfrm>
+            <a:off x="7872031" y="3625056"/>
+            <a:ext cx="3678016" cy="331986"/>
+          </a:xfrm>
+          <a:prstGeom prst="rect">
+            <a:avLst/>
+          </a:prstGeom>
+          <a:noFill/>
+          <a:ln/>
+        </p:spPr>
+        <p:txBody>
+          <a:bodyPr wrap="square" lIns="0" tIns="0" rIns="0" bIns="0" rtlCol="0" anchor="t"/>
+          <a:lstStyle/>
+          <a:p>
+            <a:pPr algn="l" indent="0" marL="0">
+              <a:lnSpc>
+                <a:spcPts val="2613"/>
+              </a:lnSpc>
+              <a:spcBef>
+                <a:spcPts val="267"/>
+              </a:spcBef>
+              <a:buNone/>
+            </a:pPr>
+            <a:r>
+              <a:rPr lang="en-US" sz="1866" b="1" dirty="0">
+                <a:solidFill>
+                  <a:srgbClr val="FFFFFF"/>
+                </a:solidFill>
+                <a:latin typeface="Inter" pitchFamily="34" charset="0"/>
+                <a:ea typeface="Inter" pitchFamily="34" charset="-122"/>
+                <a:cs typeface="Inter" pitchFamily="34" charset="-120"/>
+              </a:rPr>
+              <a:t>BLUE-GREEN</a:t>
+            </a:r>
+            <a:endParaRPr lang="en-US" sz="1866" dirty="0"/>
+          </a:p>
+        </p:txBody>
+      </p:sp>
+      <p:sp>
+        <p:nvSpPr>
+          <p:cNvPr id="15" name="Text 13"/>
+          <p:cNvSpPr/>
+          <p:nvPr/>
+        </p:nvSpPr>
+        <p:spPr>
+          <a:xfrm>
+            <a:off x="7567308" y="4504134"/>
+            <a:ext cx="4215346" cy="1947267"/>
+          </a:xfrm>
+          <a:prstGeom prst="rect">
+            <a:avLst/>
+          </a:prstGeom>
+          <a:solidFill>
+            <a:srgbClr val="1F8A82"/>
+          </a:solidFill>
+          <a:ln/>
+        </p:spPr>
+        <p:txBody>
+          <a:bodyPr wrap="square" rtlCol="0" anchor="ctr"/>
+          <a:lstStyle/>
+          <a:p>
+            <a:pPr indent="0" marL="0">
+              <a:buNone/>
+            </a:pPr>
+            <a:endParaRPr lang="en-US" dirty="0"/>
+          </a:p>
+        </p:txBody>
+      </p:sp>
+      <p:sp>
+        <p:nvSpPr>
+          <p:cNvPr id="16" name="Text 14"/>
+          <p:cNvSpPr/>
+          <p:nvPr/>
+        </p:nvSpPr>
+        <p:spPr>
+          <a:xfrm>
+            <a:off x="7872031" y="4949428"/>
+            <a:ext cx="3678016" cy="690761"/>
+          </a:xfrm>
+          <a:prstGeom prst="rect">
+            <a:avLst/>
+          </a:prstGeom>
+          <a:noFill/>
+          <a:ln/>
+        </p:spPr>
+        <p:txBody>
+          <a:bodyPr wrap="square" lIns="0" tIns="0" rIns="0" bIns="0" rtlCol="0" anchor="t"/>
+          <a:lstStyle/>
+          <a:p>
+            <a:pPr algn="l" indent="0" marL="0">
+              <a:lnSpc>
+                <a:spcPts val="5439"/>
+              </a:lnSpc>
+              <a:buNone/>
+            </a:pPr>
+            <a:r>
+              <a:rPr lang="en-US" sz="4533" b="1" dirty="0">
+                <a:solidFill>
+                  <a:srgbClr val="FFFFFF"/>
+                </a:solidFill>
+                <a:latin typeface="Archivo" pitchFamily="34" charset="0"/>
+                <a:ea typeface="Archivo" pitchFamily="34" charset="-122"/>
+                <a:cs typeface="Archivo" pitchFamily="34" charset="-120"/>
+              </a:rPr>
+              <a:t>03</a:t>
+            </a:r>
+            <a:endParaRPr lang="en-US" sz="4533" dirty="0"/>
+          </a:p>
+        </p:txBody>
+      </p:sp>
+      <p:sp>
+        <p:nvSpPr>
+          <p:cNvPr id="17" name="Text 15"/>
+          <p:cNvSpPr/>
+          <p:nvPr/>
+        </p:nvSpPr>
+        <p:spPr>
+          <a:xfrm>
+            <a:off x="7872031" y="5673923"/>
+            <a:ext cx="3678016" cy="331986"/>
+          </a:xfrm>
+          <a:prstGeom prst="rect">
+            <a:avLst/>
+          </a:prstGeom>
+          <a:noFill/>
+          <a:ln/>
+        </p:spPr>
+        <p:txBody>
+          <a:bodyPr wrap="square" lIns="0" tIns="0" rIns="0" bIns="0" rtlCol="0" anchor="t"/>
+          <a:lstStyle/>
+          <a:p>
+            <a:pPr algn="l" indent="0" marL="0">
+              <a:lnSpc>
+                <a:spcPts val="2613"/>
+              </a:lnSpc>
+              <a:spcBef>
+                <a:spcPts val="267"/>
+              </a:spcBef>
+              <a:buNone/>
+            </a:pPr>
+            <a:r>
+              <a:rPr lang="en-US" sz="1866" b="1" dirty="0">
+                <a:solidFill>
+                  <a:srgbClr val="FFFFFF"/>
+                </a:solidFill>
+                <a:latin typeface="Inter" pitchFamily="34" charset="0"/>
+                <a:ea typeface="Inter" pitchFamily="34" charset="-122"/>
+                <a:cs typeface="Inter" pitchFamily="34" charset="-120"/>
+              </a:rPr>
+              <a:t>CANARY</a:t>
+            </a:r>
+            <a:endParaRPr lang="en-US" sz="1866" dirty="0"/>
+          </a:p>
+        </p:txBody>
+      </p:sp>
     </p:spTree>
   </p:cSld>
   <p:clrMapOvr>
@@ -1259,6 +1895,13 @@
 <file path=ppt/slides/slide2.xml><?xml version="1.0" encoding="utf-8"?>
 <p:sld xmlns:a="http://schemas.openxmlformats.org/drawingml/2006/main" xmlns:r="http://schemas.openxmlformats.org/officeDocument/2006/relationships" xmlns:p="http://schemas.openxmlformats.org/presentationml/2006/main">
   <p:cSld name="Slide 2">
+    <p:bg>
+      <p:bgPr>
+        <a:solidFill>
+          <a:srgbClr val="FFFFFF"/>
+        </a:solidFill>
+      </p:bgPr>
+    </p:bg>
     <p:spTree>
       <p:nvGrpSpPr>
         <p:cNvPr id="1" name=""/>
@@ -1273,30 +1916,1275 @@
           <a:chExt cx="0" cy="0"/>
         </a:xfrm>
       </p:grpSpPr>
-      <p:pic>
-        <p:nvPicPr>
-          <p:cNvPr id="2" name="Image 0" descr="/tmp/slide-1787840594438-gcaljot91ot.png">    </p:cNvPr>
-          <p:cNvPicPr>
-            <a:picLocks noChangeAspect="1"/>
-          </p:cNvPicPr>
-          <p:nvPr/>
-        </p:nvPicPr>
-        <p:blipFill>
-          <a:blip r:embed="rId1"/>
-          <a:stretch>
-            <a:fillRect/>
-          </a:stretch>
-        </p:blipFill>
-        <p:spPr>
-          <a:xfrm>
-            <a:off x="0" y="0"/>
-            <a:ext cx="12188952" cy="6858000"/>
-          </a:xfrm>
-          <a:prstGeom prst="rect">
-            <a:avLst/>
-          </a:prstGeom>
-        </p:spPr>
-      </p:pic>
+      <p:sp>
+        <p:nvSpPr>
+          <p:cNvPr id="2" name="Text 0"/>
+          <p:cNvSpPr/>
+          <p:nvPr/>
+        </p:nvSpPr>
+        <p:spPr>
+          <a:xfrm>
+            <a:off x="507873" y="457200"/>
+            <a:ext cx="7835818" cy="528241"/>
+          </a:xfrm>
+          <a:prstGeom prst="rect">
+            <a:avLst/>
+          </a:prstGeom>
+          <a:noFill/>
+          <a:ln/>
+        </p:spPr>
+        <p:txBody>
+          <a:bodyPr wrap="square" lIns="0" tIns="0" rIns="0" bIns="0" rtlCol="0" anchor="t"/>
+          <a:lstStyle/>
+          <a:p>
+            <a:pPr algn="l" indent="0" marL="0">
+              <a:lnSpc>
+                <a:spcPts val="4159"/>
+              </a:lnSpc>
+              <a:buNone/>
+            </a:pPr>
+            <a:r>
+              <a:rPr lang="en-US" sz="3200" b="1" dirty="0">
+                <a:solidFill>
+                  <a:srgbClr val="2A2D34"/>
+                </a:solidFill>
+                <a:latin typeface="Archivo" pitchFamily="34" charset="0"/>
+                <a:ea typeface="Archivo" pitchFamily="34" charset="-122"/>
+                <a:cs typeface="Archivo" pitchFamily="34" charset="-120"/>
+              </a:rPr>
+              <a:t>Three ways to replace a running version</a:t>
+            </a:r>
+            <a:endParaRPr lang="en-US" sz="3200" dirty="0"/>
+          </a:p>
+        </p:txBody>
+      </p:sp>
+      <p:sp>
+        <p:nvSpPr>
+          <p:cNvPr id="3" name="Text 1"/>
+          <p:cNvSpPr/>
+          <p:nvPr/>
+        </p:nvSpPr>
+        <p:spPr>
+          <a:xfrm>
+            <a:off x="11223993" y="492720"/>
+            <a:ext cx="457086" cy="457200"/>
+          </a:xfrm>
+          <a:prstGeom prst="rect">
+            <a:avLst/>
+          </a:prstGeom>
+          <a:solidFill>
+            <a:srgbClr val="2A2D34"/>
+          </a:solidFill>
+          <a:ln/>
+        </p:spPr>
+        <p:txBody>
+          <a:bodyPr wrap="square" rtlCol="0" anchor="ctr"/>
+          <a:lstStyle/>
+          <a:p>
+            <a:pPr indent="0" marL="0">
+              <a:buNone/>
+            </a:pPr>
+            <a:endParaRPr lang="en-US" dirty="0"/>
+          </a:p>
+        </p:txBody>
+      </p:sp>
+      <p:sp>
+        <p:nvSpPr>
+          <p:cNvPr id="4" name="Text 2"/>
+          <p:cNvSpPr/>
+          <p:nvPr/>
+        </p:nvSpPr>
+        <p:spPr>
+          <a:xfrm>
+            <a:off x="11312871" y="567333"/>
+            <a:ext cx="284917" cy="307975"/>
+          </a:xfrm>
+          <a:prstGeom prst="rect">
+            <a:avLst/>
+          </a:prstGeom>
+          <a:noFill/>
+          <a:ln/>
+        </p:spPr>
+        <p:txBody>
+          <a:bodyPr wrap="square" lIns="0" tIns="0" rIns="0" bIns="0" rtlCol="0" anchor="t"/>
+          <a:lstStyle/>
+          <a:p>
+            <a:pPr algn="l" indent="0" marL="0">
+              <a:lnSpc>
+                <a:spcPts val="2426"/>
+              </a:lnSpc>
+              <a:buNone/>
+            </a:pPr>
+            <a:r>
+              <a:rPr lang="en-US" sz="1733" b="1" dirty="0">
+                <a:solidFill>
+                  <a:srgbClr val="FFFFFF"/>
+                </a:solidFill>
+                <a:latin typeface="Archivo" pitchFamily="34" charset="0"/>
+                <a:ea typeface="Archivo" pitchFamily="34" charset="-122"/>
+                <a:cs typeface="Archivo" pitchFamily="34" charset="-120"/>
+              </a:rPr>
+              <a:t>02</a:t>
+            </a:r>
+            <a:endParaRPr lang="en-US" sz="1733" dirty="0"/>
+          </a:p>
+        </p:txBody>
+      </p:sp>
+      <p:sp>
+        <p:nvSpPr>
+          <p:cNvPr id="5" name="Text 3"/>
+          <p:cNvSpPr/>
+          <p:nvPr/>
+        </p:nvSpPr>
+        <p:spPr>
+          <a:xfrm>
+            <a:off x="677098" y="2236589"/>
+            <a:ext cx="1519691" cy="502841"/>
+          </a:xfrm>
+          <a:prstGeom prst="rect">
+            <a:avLst/>
+          </a:prstGeom>
+          <a:noFill/>
+          <a:ln/>
+        </p:spPr>
+        <p:txBody>
+          <a:bodyPr wrap="square" lIns="0" tIns="0" rIns="0" bIns="0" rtlCol="0" anchor="t"/>
+          <a:lstStyle/>
+          <a:p>
+            <a:pPr algn="l" indent="0" marL="0">
+              <a:lnSpc>
+                <a:spcPts val="1980"/>
+              </a:lnSpc>
+              <a:buNone/>
+            </a:pPr>
+            <a:r>
+              <a:rPr lang="en-US" sz="1466" b="1" dirty="0">
+                <a:solidFill>
+                  <a:srgbClr val="2A2D34"/>
+                </a:solidFill>
+                <a:latin typeface="Inter" pitchFamily="34" charset="0"/>
+                <a:ea typeface="Inter" pitchFamily="34" charset="-122"/>
+                <a:cs typeface="Inter" pitchFamily="34" charset="-120"/>
+              </a:rPr>
+              <a:t>HOW IT RELEASES</a:t>
+            </a:r>
+            <a:endParaRPr lang="en-US" sz="1466" dirty="0"/>
+          </a:p>
+        </p:txBody>
+      </p:sp>
+      <p:sp>
+        <p:nvSpPr>
+          <p:cNvPr id="6" name="Text 4"/>
+          <p:cNvSpPr/>
+          <p:nvPr/>
+        </p:nvSpPr>
+        <p:spPr>
+          <a:xfrm>
+            <a:off x="507873" y="3110508"/>
+            <a:ext cx="1828343" cy="1244798"/>
+          </a:xfrm>
+          <a:prstGeom prst="rect">
+            <a:avLst/>
+          </a:prstGeom>
+          <a:solidFill>
+            <a:srgbClr val="E8A317"/>
+          </a:solidFill>
+          <a:ln/>
+        </p:spPr>
+        <p:txBody>
+          <a:bodyPr wrap="square" rtlCol="0" anchor="ctr"/>
+          <a:lstStyle/>
+          <a:p>
+            <a:pPr indent="0" marL="0">
+              <a:buNone/>
+            </a:pPr>
+            <a:endParaRPr lang="en-US" dirty="0"/>
+          </a:p>
+        </p:txBody>
+      </p:sp>
+      <p:sp>
+        <p:nvSpPr>
+          <p:cNvPr id="7" name="Text 5"/>
+          <p:cNvSpPr/>
+          <p:nvPr/>
+        </p:nvSpPr>
+        <p:spPr>
+          <a:xfrm>
+            <a:off x="677098" y="3481388"/>
+            <a:ext cx="1519691" cy="502841"/>
+          </a:xfrm>
+          <a:prstGeom prst="rect">
+            <a:avLst/>
+          </a:prstGeom>
+          <a:noFill/>
+          <a:ln/>
+        </p:spPr>
+        <p:txBody>
+          <a:bodyPr wrap="square" lIns="0" tIns="0" rIns="0" bIns="0" rtlCol="0" anchor="t"/>
+          <a:lstStyle/>
+          <a:p>
+            <a:pPr algn="l" indent="0" marL="0">
+              <a:lnSpc>
+                <a:spcPts val="1980"/>
+              </a:lnSpc>
+              <a:buNone/>
+            </a:pPr>
+            <a:r>
+              <a:rPr lang="en-US" sz="1466" b="1" dirty="0">
+                <a:solidFill>
+                  <a:srgbClr val="2A2D34"/>
+                </a:solidFill>
+                <a:latin typeface="Inter" pitchFamily="34" charset="0"/>
+                <a:ea typeface="Inter" pitchFamily="34" charset="-122"/>
+                <a:cs typeface="Inter" pitchFamily="34" charset="-120"/>
+              </a:rPr>
+              <a:t>HOW IT ROLLS BACK</a:t>
+            </a:r>
+            <a:endParaRPr lang="en-US" sz="1466" dirty="0"/>
+          </a:p>
+        </p:txBody>
+      </p:sp>
+      <p:sp>
+        <p:nvSpPr>
+          <p:cNvPr id="8" name="Text 6"/>
+          <p:cNvSpPr/>
+          <p:nvPr/>
+        </p:nvSpPr>
+        <p:spPr>
+          <a:xfrm>
+            <a:off x="677098" y="4726186"/>
+            <a:ext cx="1519691" cy="502841"/>
+          </a:xfrm>
+          <a:prstGeom prst="rect">
+            <a:avLst/>
+          </a:prstGeom>
+          <a:noFill/>
+          <a:ln/>
+        </p:spPr>
+        <p:txBody>
+          <a:bodyPr wrap="square" lIns="0" tIns="0" rIns="0" bIns="0" rtlCol="0" anchor="t"/>
+          <a:lstStyle/>
+          <a:p>
+            <a:pPr algn="l" indent="0" marL="0">
+              <a:lnSpc>
+                <a:spcPts val="1980"/>
+              </a:lnSpc>
+              <a:buNone/>
+            </a:pPr>
+            <a:r>
+              <a:rPr lang="en-US" sz="1466" b="1" dirty="0">
+                <a:solidFill>
+                  <a:srgbClr val="2A2D34"/>
+                </a:solidFill>
+                <a:latin typeface="Inter" pitchFamily="34" charset="0"/>
+                <a:ea typeface="Inter" pitchFamily="34" charset="-122"/>
+                <a:cs typeface="Inter" pitchFamily="34" charset="-120"/>
+              </a:rPr>
+              <a:t>WHAT IT COSTS YOU</a:t>
+            </a:r>
+            <a:endParaRPr lang="en-US" sz="1466" dirty="0"/>
+          </a:p>
+        </p:txBody>
+      </p:sp>
+      <p:sp>
+        <p:nvSpPr>
+          <p:cNvPr id="9" name="Text 7"/>
+          <p:cNvSpPr/>
+          <p:nvPr/>
+        </p:nvSpPr>
+        <p:spPr>
+          <a:xfrm>
+            <a:off x="2437790" y="1222375"/>
+            <a:ext cx="3013314" cy="4377928"/>
+          </a:xfrm>
+          <a:prstGeom prst="rect">
+            <a:avLst/>
+          </a:prstGeom>
+          <a:solidFill>
+            <a:srgbClr val="2A2D34"/>
+          </a:solidFill>
+          <a:ln/>
+        </p:spPr>
+        <p:txBody>
+          <a:bodyPr wrap="square" rtlCol="0" anchor="ctr"/>
+          <a:lstStyle/>
+          <a:p>
+            <a:pPr indent="0" marL="0">
+              <a:buNone/>
+            </a:pPr>
+            <a:endParaRPr lang="en-US" dirty="0"/>
+          </a:p>
+        </p:txBody>
+      </p:sp>
+      <p:sp>
+        <p:nvSpPr>
+          <p:cNvPr id="10" name="Text 8"/>
+          <p:cNvSpPr/>
+          <p:nvPr/>
+        </p:nvSpPr>
+        <p:spPr>
+          <a:xfrm>
+            <a:off x="2640940" y="1368028"/>
+            <a:ext cx="336720" cy="352028"/>
+          </a:xfrm>
+          <a:prstGeom prst="rect">
+            <a:avLst/>
+          </a:prstGeom>
+          <a:noFill/>
+          <a:ln/>
+        </p:spPr>
+        <p:txBody>
+          <a:bodyPr wrap="square" lIns="0" tIns="0" rIns="0" bIns="0" rtlCol="0" anchor="t"/>
+          <a:lstStyle/>
+          <a:p>
+            <a:pPr algn="l" indent="0" marL="0">
+              <a:lnSpc>
+                <a:spcPts val="2773"/>
+              </a:lnSpc>
+              <a:buNone/>
+            </a:pPr>
+            <a:r>
+              <a:rPr lang="en-US" sz="2133" b="1" dirty="0">
+                <a:solidFill>
+                  <a:srgbClr val="FFFFFF"/>
+                </a:solidFill>
+                <a:latin typeface="Archivo" pitchFamily="34" charset="0"/>
+                <a:ea typeface="Archivo" pitchFamily="34" charset="-122"/>
+                <a:cs typeface="Archivo" pitchFamily="34" charset="-120"/>
+              </a:rPr>
+              <a:t>01</a:t>
+            </a:r>
+            <a:endParaRPr lang="en-US" sz="2133" dirty="0"/>
+          </a:p>
+        </p:txBody>
+      </p:sp>
+      <p:sp>
+        <p:nvSpPr>
+          <p:cNvPr id="11" name="Text 9"/>
+          <p:cNvSpPr/>
+          <p:nvPr/>
+        </p:nvSpPr>
+        <p:spPr>
+          <a:xfrm>
+            <a:off x="3106358" y="1395412"/>
+            <a:ext cx="1065605" cy="297061"/>
+          </a:xfrm>
+          <a:prstGeom prst="rect">
+            <a:avLst/>
+          </a:prstGeom>
+          <a:noFill/>
+          <a:ln/>
+        </p:spPr>
+        <p:txBody>
+          <a:bodyPr wrap="square" lIns="0" tIns="0" rIns="0" bIns="0" rtlCol="0" anchor="t"/>
+          <a:lstStyle/>
+          <a:p>
+            <a:pPr algn="l" indent="0" marL="0">
+              <a:lnSpc>
+                <a:spcPts val="2340"/>
+              </a:lnSpc>
+              <a:buNone/>
+            </a:pPr>
+            <a:r>
+              <a:rPr lang="en-US" sz="1733" b="1" dirty="0">
+                <a:solidFill>
+                  <a:srgbClr val="FFFFFF"/>
+                </a:solidFill>
+                <a:latin typeface="Inter" pitchFamily="34" charset="0"/>
+                <a:ea typeface="Inter" pitchFamily="34" charset="-122"/>
+                <a:cs typeface="Inter" pitchFamily="34" charset="-120"/>
+              </a:rPr>
+              <a:t>ROLLING</a:t>
+            </a:r>
+            <a:endParaRPr lang="en-US" sz="1733" dirty="0"/>
+          </a:p>
+        </p:txBody>
+      </p:sp>
+      <p:sp>
+        <p:nvSpPr>
+          <p:cNvPr id="12" name="Shape 10"/>
+          <p:cNvSpPr/>
+          <p:nvPr/>
+        </p:nvSpPr>
+        <p:spPr>
+          <a:xfrm>
+            <a:off x="2437790" y="1872059"/>
+            <a:ext cx="3013314" cy="0"/>
+          </a:xfrm>
+          <a:prstGeom prst="line">
+            <a:avLst/>
+          </a:prstGeom>
+          <a:noFill/>
+          <a:ln w="12698">
+            <a:solidFill>
+              <a:srgbClr val="FFFFFF"/>
+            </a:solidFill>
+            <a:prstDash val="solid"/>
+          </a:ln>
+        </p:spPr>
+      </p:sp>
+      <p:sp>
+        <p:nvSpPr>
+          <p:cNvPr id="13" name="Text 11"/>
+          <p:cNvSpPr/>
+          <p:nvPr/>
+        </p:nvSpPr>
+        <p:spPr>
+          <a:xfrm>
+            <a:off x="2640940" y="2162373"/>
+            <a:ext cx="2659156" cy="663972"/>
+          </a:xfrm>
+          <a:prstGeom prst="rect">
+            <a:avLst/>
+          </a:prstGeom>
+          <a:noFill/>
+          <a:ln/>
+        </p:spPr>
+        <p:txBody>
+          <a:bodyPr wrap="square" lIns="0" tIns="0" rIns="0" bIns="0" rtlCol="0" anchor="t"/>
+          <a:lstStyle/>
+          <a:p>
+            <a:pPr algn="l" indent="0" marL="0">
+              <a:lnSpc>
+                <a:spcPts val="2613"/>
+              </a:lnSpc>
+              <a:buNone/>
+            </a:pPr>
+            <a:r>
+              <a:rPr lang="en-US" sz="1866" b="1" dirty="0">
+                <a:solidFill>
+                  <a:srgbClr val="FFFFFF"/>
+                </a:solidFill>
+                <a:latin typeface="Inter" pitchFamily="34" charset="0"/>
+                <a:ea typeface="Inter" pitchFamily="34" charset="-122"/>
+                <a:cs typeface="Inter" pitchFamily="34" charset="-120"/>
+              </a:rPr>
+              <a:t>Replacing instances in batches</a:t>
+            </a:r>
+            <a:endParaRPr lang="en-US" sz="1866" dirty="0"/>
+          </a:p>
+        </p:txBody>
+      </p:sp>
+      <p:sp>
+        <p:nvSpPr>
+          <p:cNvPr id="14" name="Shape 12"/>
+          <p:cNvSpPr/>
+          <p:nvPr/>
+        </p:nvSpPr>
+        <p:spPr>
+          <a:xfrm>
+            <a:off x="2437790" y="3116858"/>
+            <a:ext cx="3013314" cy="0"/>
+          </a:xfrm>
+          <a:prstGeom prst="line">
+            <a:avLst/>
+          </a:prstGeom>
+          <a:noFill/>
+          <a:ln w="12698">
+            <a:solidFill>
+              <a:srgbClr val="FFFFFF"/>
+            </a:solidFill>
+            <a:prstDash val="solid"/>
+          </a:ln>
+        </p:spPr>
+      </p:sp>
+      <p:sp>
+        <p:nvSpPr>
+          <p:cNvPr id="15" name="Text 13"/>
+          <p:cNvSpPr/>
+          <p:nvPr/>
+        </p:nvSpPr>
+        <p:spPr>
+          <a:xfrm>
+            <a:off x="2640940" y="3241278"/>
+            <a:ext cx="2659156" cy="995958"/>
+          </a:xfrm>
+          <a:prstGeom prst="rect">
+            <a:avLst/>
+          </a:prstGeom>
+          <a:noFill/>
+          <a:ln/>
+        </p:spPr>
+        <p:txBody>
+          <a:bodyPr wrap="square" lIns="0" tIns="0" rIns="0" bIns="0" rtlCol="0" anchor="t"/>
+          <a:lstStyle/>
+          <a:p>
+            <a:pPr algn="l" indent="0" marL="0">
+              <a:lnSpc>
+                <a:spcPts val="2613"/>
+              </a:lnSpc>
+              <a:buNone/>
+            </a:pPr>
+            <a:r>
+              <a:rPr lang="en-US" sz="1866" b="1" dirty="0">
+                <a:solidFill>
+                  <a:srgbClr val="FFFFFF"/>
+                </a:solidFill>
+                <a:latin typeface="Inter" pitchFamily="34" charset="0"/>
+                <a:ea typeface="Inter" pitchFamily="34" charset="-122"/>
+                <a:cs typeface="Inter" pitchFamily="34" charset="-120"/>
+              </a:rPr>
+              <a:t>Deploying the old build again, batch by batch</a:t>
+            </a:r>
+            <a:endParaRPr lang="en-US" sz="1866" dirty="0"/>
+          </a:p>
+        </p:txBody>
+      </p:sp>
+      <p:sp>
+        <p:nvSpPr>
+          <p:cNvPr id="16" name="Shape 14"/>
+          <p:cNvSpPr/>
+          <p:nvPr/>
+        </p:nvSpPr>
+        <p:spPr>
+          <a:xfrm>
+            <a:off x="2437790" y="4361656"/>
+            <a:ext cx="3013314" cy="0"/>
+          </a:xfrm>
+          <a:prstGeom prst="line">
+            <a:avLst/>
+          </a:prstGeom>
+          <a:noFill/>
+          <a:ln w="12698">
+            <a:solidFill>
+              <a:srgbClr val="FFFFFF"/>
+            </a:solidFill>
+            <a:prstDash val="solid"/>
+          </a:ln>
+        </p:spPr>
+      </p:sp>
+      <p:sp>
+        <p:nvSpPr>
+          <p:cNvPr id="17" name="Text 15"/>
+          <p:cNvSpPr/>
+          <p:nvPr/>
+        </p:nvSpPr>
+        <p:spPr>
+          <a:xfrm>
+            <a:off x="2640940" y="4486077"/>
+            <a:ext cx="2659156" cy="995958"/>
+          </a:xfrm>
+          <a:prstGeom prst="rect">
+            <a:avLst/>
+          </a:prstGeom>
+          <a:noFill/>
+          <a:ln/>
+        </p:spPr>
+        <p:txBody>
+          <a:bodyPr wrap="square" lIns="0" tIns="0" rIns="0" bIns="0" rtlCol="0" anchor="t"/>
+          <a:lstStyle/>
+          <a:p>
+            <a:pPr algn="l" indent="0" marL="0">
+              <a:lnSpc>
+                <a:spcPts val="2613"/>
+              </a:lnSpc>
+              <a:buNone/>
+            </a:pPr>
+            <a:r>
+              <a:rPr lang="en-US" sz="1866" b="1" dirty="0">
+                <a:solidFill>
+                  <a:srgbClr val="FFFFFF"/>
+                </a:solidFill>
+                <a:latin typeface="Inter" pitchFamily="34" charset="0"/>
+                <a:ea typeface="Inter" pitchFamily="34" charset="-122"/>
+                <a:cs typeface="Inter" pitchFamily="34" charset="-120"/>
+              </a:rPr>
+              <a:t>One fleet, with headroom for the surge</a:t>
+            </a:r>
+            <a:endParaRPr lang="en-US" sz="1866" dirty="0"/>
+          </a:p>
+        </p:txBody>
+      </p:sp>
+      <p:sp>
+        <p:nvSpPr>
+          <p:cNvPr id="18" name="Text 16"/>
+          <p:cNvSpPr/>
+          <p:nvPr/>
+        </p:nvSpPr>
+        <p:spPr>
+          <a:xfrm>
+            <a:off x="5552679" y="1222375"/>
+            <a:ext cx="3013314" cy="4377928"/>
+          </a:xfrm>
+          <a:prstGeom prst="rect">
+            <a:avLst/>
+          </a:prstGeom>
+          <a:solidFill>
+            <a:srgbClr val="1F8A82"/>
+          </a:solidFill>
+          <a:ln/>
+        </p:spPr>
+        <p:txBody>
+          <a:bodyPr wrap="square" rtlCol="0" anchor="ctr"/>
+          <a:lstStyle/>
+          <a:p>
+            <a:pPr indent="0" marL="0">
+              <a:buNone/>
+            </a:pPr>
+            <a:endParaRPr lang="en-US" dirty="0"/>
+          </a:p>
+        </p:txBody>
+      </p:sp>
+      <p:sp>
+        <p:nvSpPr>
+          <p:cNvPr id="19" name="Text 17"/>
+          <p:cNvSpPr/>
+          <p:nvPr/>
+        </p:nvSpPr>
+        <p:spPr>
+          <a:xfrm>
+            <a:off x="5755828" y="1368028"/>
+            <a:ext cx="336720" cy="352028"/>
+          </a:xfrm>
+          <a:prstGeom prst="rect">
+            <a:avLst/>
+          </a:prstGeom>
+          <a:noFill/>
+          <a:ln/>
+        </p:spPr>
+        <p:txBody>
+          <a:bodyPr wrap="square" lIns="0" tIns="0" rIns="0" bIns="0" rtlCol="0" anchor="t"/>
+          <a:lstStyle/>
+          <a:p>
+            <a:pPr algn="l" indent="0" marL="0">
+              <a:lnSpc>
+                <a:spcPts val="2773"/>
+              </a:lnSpc>
+              <a:buNone/>
+            </a:pPr>
+            <a:r>
+              <a:rPr lang="en-US" sz="2133" b="1" dirty="0">
+                <a:solidFill>
+                  <a:srgbClr val="FFFFFF"/>
+                </a:solidFill>
+                <a:latin typeface="Archivo" pitchFamily="34" charset="0"/>
+                <a:ea typeface="Archivo" pitchFamily="34" charset="-122"/>
+                <a:cs typeface="Archivo" pitchFamily="34" charset="-120"/>
+              </a:rPr>
+              <a:t>02</a:t>
+            </a:r>
+            <a:endParaRPr lang="en-US" sz="2133" dirty="0"/>
+          </a:p>
+        </p:txBody>
+      </p:sp>
+      <p:sp>
+        <p:nvSpPr>
+          <p:cNvPr id="20" name="Text 18"/>
+          <p:cNvSpPr/>
+          <p:nvPr/>
+        </p:nvSpPr>
+        <p:spPr>
+          <a:xfrm>
+            <a:off x="6221246" y="1395412"/>
+            <a:ext cx="1585254" cy="297061"/>
+          </a:xfrm>
+          <a:prstGeom prst="rect">
+            <a:avLst/>
+          </a:prstGeom>
+          <a:noFill/>
+          <a:ln/>
+        </p:spPr>
+        <p:txBody>
+          <a:bodyPr wrap="square" lIns="0" tIns="0" rIns="0" bIns="0" rtlCol="0" anchor="t"/>
+          <a:lstStyle/>
+          <a:p>
+            <a:pPr algn="l" indent="0" marL="0">
+              <a:lnSpc>
+                <a:spcPts val="2340"/>
+              </a:lnSpc>
+              <a:buNone/>
+            </a:pPr>
+            <a:r>
+              <a:rPr lang="en-US" sz="1733" b="1" dirty="0">
+                <a:solidFill>
+                  <a:srgbClr val="FFFFFF"/>
+                </a:solidFill>
+                <a:latin typeface="Inter" pitchFamily="34" charset="0"/>
+                <a:ea typeface="Inter" pitchFamily="34" charset="-122"/>
+                <a:cs typeface="Inter" pitchFamily="34" charset="-120"/>
+              </a:rPr>
+              <a:t>BLUE-GREEN</a:t>
+            </a:r>
+            <a:endParaRPr lang="en-US" sz="1733" dirty="0"/>
+          </a:p>
+        </p:txBody>
+      </p:sp>
+      <p:sp>
+        <p:nvSpPr>
+          <p:cNvPr id="21" name="Shape 19"/>
+          <p:cNvSpPr/>
+          <p:nvPr/>
+        </p:nvSpPr>
+        <p:spPr>
+          <a:xfrm>
+            <a:off x="5552679" y="1872059"/>
+            <a:ext cx="3013314" cy="0"/>
+          </a:xfrm>
+          <a:prstGeom prst="line">
+            <a:avLst/>
+          </a:prstGeom>
+          <a:noFill/>
+          <a:ln w="12698">
+            <a:solidFill>
+              <a:srgbClr val="FFFFFF"/>
+            </a:solidFill>
+            <a:prstDash val="solid"/>
+          </a:ln>
+        </p:spPr>
+      </p:sp>
+      <p:sp>
+        <p:nvSpPr>
+          <p:cNvPr id="22" name="Text 20"/>
+          <p:cNvSpPr/>
+          <p:nvPr/>
+        </p:nvSpPr>
+        <p:spPr>
+          <a:xfrm>
+            <a:off x="5755828" y="2162373"/>
+            <a:ext cx="2659156" cy="663972"/>
+          </a:xfrm>
+          <a:prstGeom prst="rect">
+            <a:avLst/>
+          </a:prstGeom>
+          <a:noFill/>
+          <a:ln/>
+        </p:spPr>
+        <p:txBody>
+          <a:bodyPr wrap="square" lIns="0" tIns="0" rIns="0" bIns="0" rtlCol="0" anchor="t"/>
+          <a:lstStyle/>
+          <a:p>
+            <a:pPr algn="l" indent="0" marL="0">
+              <a:lnSpc>
+                <a:spcPts val="2613"/>
+              </a:lnSpc>
+              <a:buNone/>
+            </a:pPr>
+            <a:r>
+              <a:rPr lang="en-US" sz="1866" b="1" dirty="0">
+                <a:solidFill>
+                  <a:srgbClr val="FFFFFF"/>
+                </a:solidFill>
+                <a:latin typeface="Inter" pitchFamily="34" charset="0"/>
+                <a:ea typeface="Inter" pitchFamily="34" charset="-122"/>
+                <a:cs typeface="Inter" pitchFamily="34" charset="-120"/>
+              </a:rPr>
+              <a:t>Switching a router to a second full stack</a:t>
+            </a:r>
+            <a:endParaRPr lang="en-US" sz="1866" dirty="0"/>
+          </a:p>
+        </p:txBody>
+      </p:sp>
+      <p:sp>
+        <p:nvSpPr>
+          <p:cNvPr id="23" name="Shape 21"/>
+          <p:cNvSpPr/>
+          <p:nvPr/>
+        </p:nvSpPr>
+        <p:spPr>
+          <a:xfrm>
+            <a:off x="5552679" y="3116858"/>
+            <a:ext cx="3013314" cy="0"/>
+          </a:xfrm>
+          <a:prstGeom prst="line">
+            <a:avLst/>
+          </a:prstGeom>
+          <a:noFill/>
+          <a:ln w="12698">
+            <a:solidFill>
+              <a:srgbClr val="FFFFFF"/>
+            </a:solidFill>
+            <a:prstDash val="solid"/>
+          </a:ln>
+        </p:spPr>
+      </p:sp>
+      <p:sp>
+        <p:nvSpPr>
+          <p:cNvPr id="24" name="Text 22"/>
+          <p:cNvSpPr/>
+          <p:nvPr/>
+        </p:nvSpPr>
+        <p:spPr>
+          <a:xfrm>
+            <a:off x="5755828" y="3407172"/>
+            <a:ext cx="2659156" cy="663972"/>
+          </a:xfrm>
+          <a:prstGeom prst="rect">
+            <a:avLst/>
+          </a:prstGeom>
+          <a:noFill/>
+          <a:ln/>
+        </p:spPr>
+        <p:txBody>
+          <a:bodyPr wrap="square" lIns="0" tIns="0" rIns="0" bIns="0" rtlCol="0" anchor="t"/>
+          <a:lstStyle/>
+          <a:p>
+            <a:pPr algn="l" indent="0" marL="0">
+              <a:lnSpc>
+                <a:spcPts val="2613"/>
+              </a:lnSpc>
+              <a:buNone/>
+            </a:pPr>
+            <a:r>
+              <a:rPr lang="en-US" sz="1866" b="1" dirty="0">
+                <a:solidFill>
+                  <a:srgbClr val="FFFFFF"/>
+                </a:solidFill>
+                <a:latin typeface="Inter" pitchFamily="34" charset="0"/>
+                <a:ea typeface="Inter" pitchFamily="34" charset="-122"/>
+                <a:cs typeface="Inter" pitchFamily="34" charset="-120"/>
+              </a:rPr>
+              <a:t>Switching the router back</a:t>
+            </a:r>
+            <a:endParaRPr lang="en-US" sz="1866" dirty="0"/>
+          </a:p>
+        </p:txBody>
+      </p:sp>
+      <p:sp>
+        <p:nvSpPr>
+          <p:cNvPr id="25" name="Shape 23"/>
+          <p:cNvSpPr/>
+          <p:nvPr/>
+        </p:nvSpPr>
+        <p:spPr>
+          <a:xfrm>
+            <a:off x="5552679" y="4361656"/>
+            <a:ext cx="3013314" cy="0"/>
+          </a:xfrm>
+          <a:prstGeom prst="line">
+            <a:avLst/>
+          </a:prstGeom>
+          <a:noFill/>
+          <a:ln w="12698">
+            <a:solidFill>
+              <a:srgbClr val="FFFFFF"/>
+            </a:solidFill>
+            <a:prstDash val="solid"/>
+          </a:ln>
+        </p:spPr>
+      </p:sp>
+      <p:sp>
+        <p:nvSpPr>
+          <p:cNvPr id="26" name="Text 24"/>
+          <p:cNvSpPr/>
+          <p:nvPr/>
+        </p:nvSpPr>
+        <p:spPr>
+          <a:xfrm>
+            <a:off x="5755828" y="4651970"/>
+            <a:ext cx="2659156" cy="663972"/>
+          </a:xfrm>
+          <a:prstGeom prst="rect">
+            <a:avLst/>
+          </a:prstGeom>
+          <a:noFill/>
+          <a:ln/>
+        </p:spPr>
+        <p:txBody>
+          <a:bodyPr wrap="square" lIns="0" tIns="0" rIns="0" bIns="0" rtlCol="0" anchor="t"/>
+          <a:lstStyle/>
+          <a:p>
+            <a:pPr algn="l" indent="0" marL="0">
+              <a:lnSpc>
+                <a:spcPts val="2613"/>
+              </a:lnSpc>
+              <a:buNone/>
+            </a:pPr>
+            <a:r>
+              <a:rPr lang="en-US" sz="1866" b="1" dirty="0">
+                <a:solidFill>
+                  <a:srgbClr val="FFFFFF"/>
+                </a:solidFill>
+                <a:latin typeface="Inter" pitchFamily="34" charset="0"/>
+                <a:ea typeface="Inter" pitchFamily="34" charset="-122"/>
+                <a:cs typeface="Inter" pitchFamily="34" charset="-120"/>
+              </a:rPr>
+              <a:t>Two full environments at once</a:t>
+            </a:r>
+            <a:endParaRPr lang="en-US" sz="1866" dirty="0"/>
+          </a:p>
+        </p:txBody>
+      </p:sp>
+      <p:sp>
+        <p:nvSpPr>
+          <p:cNvPr id="27" name="Text 25"/>
+          <p:cNvSpPr/>
+          <p:nvPr/>
+        </p:nvSpPr>
+        <p:spPr>
+          <a:xfrm>
+            <a:off x="8667567" y="1222375"/>
+            <a:ext cx="3013314" cy="4377928"/>
+          </a:xfrm>
+          <a:prstGeom prst="rect">
+            <a:avLst/>
+          </a:prstGeom>
+          <a:solidFill>
+            <a:srgbClr val="2A2D34"/>
+          </a:solidFill>
+          <a:ln/>
+        </p:spPr>
+        <p:txBody>
+          <a:bodyPr wrap="square" rtlCol="0" anchor="ctr"/>
+          <a:lstStyle/>
+          <a:p>
+            <a:pPr indent="0" marL="0">
+              <a:buNone/>
+            </a:pPr>
+            <a:endParaRPr lang="en-US" dirty="0"/>
+          </a:p>
+        </p:txBody>
+      </p:sp>
+      <p:sp>
+        <p:nvSpPr>
+          <p:cNvPr id="28" name="Text 26"/>
+          <p:cNvSpPr/>
+          <p:nvPr/>
+        </p:nvSpPr>
+        <p:spPr>
+          <a:xfrm>
+            <a:off x="8870716" y="1368028"/>
+            <a:ext cx="336720" cy="352028"/>
+          </a:xfrm>
+          <a:prstGeom prst="rect">
+            <a:avLst/>
+          </a:prstGeom>
+          <a:noFill/>
+          <a:ln/>
+        </p:spPr>
+        <p:txBody>
+          <a:bodyPr wrap="square" lIns="0" tIns="0" rIns="0" bIns="0" rtlCol="0" anchor="t"/>
+          <a:lstStyle/>
+          <a:p>
+            <a:pPr algn="l" indent="0" marL="0">
+              <a:lnSpc>
+                <a:spcPts val="2773"/>
+              </a:lnSpc>
+              <a:buNone/>
+            </a:pPr>
+            <a:r>
+              <a:rPr lang="en-US" sz="2133" b="1" dirty="0">
+                <a:solidFill>
+                  <a:srgbClr val="FFFFFF"/>
+                </a:solidFill>
+                <a:latin typeface="Archivo" pitchFamily="34" charset="0"/>
+                <a:ea typeface="Archivo" pitchFamily="34" charset="-122"/>
+                <a:cs typeface="Archivo" pitchFamily="34" charset="-120"/>
+              </a:rPr>
+              <a:t>03</a:t>
+            </a:r>
+            <a:endParaRPr lang="en-US" sz="2133" dirty="0"/>
+          </a:p>
+        </p:txBody>
+      </p:sp>
+      <p:sp>
+        <p:nvSpPr>
+          <p:cNvPr id="29" name="Text 27"/>
+          <p:cNvSpPr/>
+          <p:nvPr/>
+        </p:nvSpPr>
+        <p:spPr>
+          <a:xfrm>
+            <a:off x="9336134" y="1395412"/>
+            <a:ext cx="1052249" cy="297061"/>
+          </a:xfrm>
+          <a:prstGeom prst="rect">
+            <a:avLst/>
+          </a:prstGeom>
+          <a:noFill/>
+          <a:ln/>
+        </p:spPr>
+        <p:txBody>
+          <a:bodyPr wrap="square" lIns="0" tIns="0" rIns="0" bIns="0" rtlCol="0" anchor="t"/>
+          <a:lstStyle/>
+          <a:p>
+            <a:pPr algn="l" indent="0" marL="0">
+              <a:lnSpc>
+                <a:spcPts val="2340"/>
+              </a:lnSpc>
+              <a:buNone/>
+            </a:pPr>
+            <a:r>
+              <a:rPr lang="en-US" sz="1733" b="1" dirty="0">
+                <a:solidFill>
+                  <a:srgbClr val="FFFFFF"/>
+                </a:solidFill>
+                <a:latin typeface="Inter" pitchFamily="34" charset="0"/>
+                <a:ea typeface="Inter" pitchFamily="34" charset="-122"/>
+                <a:cs typeface="Inter" pitchFamily="34" charset="-120"/>
+              </a:rPr>
+              <a:t>CANARY</a:t>
+            </a:r>
+            <a:endParaRPr lang="en-US" sz="1733" dirty="0"/>
+          </a:p>
+        </p:txBody>
+      </p:sp>
+      <p:sp>
+        <p:nvSpPr>
+          <p:cNvPr id="30" name="Shape 28"/>
+          <p:cNvSpPr/>
+          <p:nvPr/>
+        </p:nvSpPr>
+        <p:spPr>
+          <a:xfrm>
+            <a:off x="8667567" y="1872059"/>
+            <a:ext cx="3013314" cy="0"/>
+          </a:xfrm>
+          <a:prstGeom prst="line">
+            <a:avLst/>
+          </a:prstGeom>
+          <a:noFill/>
+          <a:ln w="12698">
+            <a:solidFill>
+              <a:srgbClr val="FFFFFF"/>
+            </a:solidFill>
+            <a:prstDash val="solid"/>
+          </a:ln>
+        </p:spPr>
+      </p:sp>
+      <p:sp>
+        <p:nvSpPr>
+          <p:cNvPr id="31" name="Text 29"/>
+          <p:cNvSpPr/>
+          <p:nvPr/>
+        </p:nvSpPr>
+        <p:spPr>
+          <a:xfrm>
+            <a:off x="8870716" y="2162373"/>
+            <a:ext cx="2659156" cy="663972"/>
+          </a:xfrm>
+          <a:prstGeom prst="rect">
+            <a:avLst/>
+          </a:prstGeom>
+          <a:noFill/>
+          <a:ln/>
+        </p:spPr>
+        <p:txBody>
+          <a:bodyPr wrap="square" lIns="0" tIns="0" rIns="0" bIns="0" rtlCol="0" anchor="t"/>
+          <a:lstStyle/>
+          <a:p>
+            <a:pPr algn="l" indent="0" marL="0">
+              <a:lnSpc>
+                <a:spcPts val="2613"/>
+              </a:lnSpc>
+              <a:buNone/>
+            </a:pPr>
+            <a:r>
+              <a:rPr lang="en-US" sz="1866" b="1" dirty="0">
+                <a:solidFill>
+                  <a:srgbClr val="FFFFFF"/>
+                </a:solidFill>
+                <a:latin typeface="Inter" pitchFamily="34" charset="0"/>
+                <a:ea typeface="Inter" pitchFamily="34" charset="-122"/>
+                <a:cs typeface="Inter" pitchFamily="34" charset="-120"/>
+              </a:rPr>
+              <a:t>Sending a slice of traffic to the new build</a:t>
+            </a:r>
+            <a:endParaRPr lang="en-US" sz="1866" dirty="0"/>
+          </a:p>
+        </p:txBody>
+      </p:sp>
+      <p:sp>
+        <p:nvSpPr>
+          <p:cNvPr id="32" name="Shape 30"/>
+          <p:cNvSpPr/>
+          <p:nvPr/>
+        </p:nvSpPr>
+        <p:spPr>
+          <a:xfrm>
+            <a:off x="8667567" y="3116858"/>
+            <a:ext cx="3013314" cy="0"/>
+          </a:xfrm>
+          <a:prstGeom prst="line">
+            <a:avLst/>
+          </a:prstGeom>
+          <a:noFill/>
+          <a:ln w="12698">
+            <a:solidFill>
+              <a:srgbClr val="FFFFFF"/>
+            </a:solidFill>
+            <a:prstDash val="solid"/>
+          </a:ln>
+        </p:spPr>
+      </p:sp>
+      <p:sp>
+        <p:nvSpPr>
+          <p:cNvPr id="33" name="Text 31"/>
+          <p:cNvSpPr/>
+          <p:nvPr/>
+        </p:nvSpPr>
+        <p:spPr>
+          <a:xfrm>
+            <a:off x="8870716" y="3573264"/>
+            <a:ext cx="2659156" cy="331986"/>
+          </a:xfrm>
+          <a:prstGeom prst="rect">
+            <a:avLst/>
+          </a:prstGeom>
+          <a:noFill/>
+          <a:ln/>
+        </p:spPr>
+        <p:txBody>
+          <a:bodyPr wrap="square" lIns="0" tIns="0" rIns="0" bIns="0" rtlCol="0" anchor="t"/>
+          <a:lstStyle/>
+          <a:p>
+            <a:pPr algn="l" indent="0" marL="0">
+              <a:lnSpc>
+                <a:spcPts val="2613"/>
+              </a:lnSpc>
+              <a:buNone/>
+            </a:pPr>
+            <a:r>
+              <a:rPr lang="en-US" sz="1866" b="1" dirty="0">
+                <a:solidFill>
+                  <a:srgbClr val="FFFFFF"/>
+                </a:solidFill>
+                <a:latin typeface="Inter" pitchFamily="34" charset="0"/>
+                <a:ea typeface="Inter" pitchFamily="34" charset="-122"/>
+                <a:cs typeface="Inter" pitchFamily="34" charset="-120"/>
+              </a:rPr>
+              <a:t>Withdrawing the slice</a:t>
+            </a:r>
+            <a:endParaRPr lang="en-US" sz="1866" dirty="0"/>
+          </a:p>
+        </p:txBody>
+      </p:sp>
+      <p:sp>
+        <p:nvSpPr>
+          <p:cNvPr id="34" name="Shape 32"/>
+          <p:cNvSpPr/>
+          <p:nvPr/>
+        </p:nvSpPr>
+        <p:spPr>
+          <a:xfrm>
+            <a:off x="8667567" y="4361656"/>
+            <a:ext cx="3013314" cy="0"/>
+          </a:xfrm>
+          <a:prstGeom prst="line">
+            <a:avLst/>
+          </a:prstGeom>
+          <a:noFill/>
+          <a:ln w="12698">
+            <a:solidFill>
+              <a:srgbClr val="FFFFFF"/>
+            </a:solidFill>
+            <a:prstDash val="solid"/>
+          </a:ln>
+        </p:spPr>
+      </p:sp>
+      <p:sp>
+        <p:nvSpPr>
+          <p:cNvPr id="35" name="Text 33"/>
+          <p:cNvSpPr/>
+          <p:nvPr/>
+        </p:nvSpPr>
+        <p:spPr>
+          <a:xfrm>
+            <a:off x="8870716" y="4651970"/>
+            <a:ext cx="2659156" cy="663972"/>
+          </a:xfrm>
+          <a:prstGeom prst="rect">
+            <a:avLst/>
+          </a:prstGeom>
+          <a:noFill/>
+          <a:ln/>
+        </p:spPr>
+        <p:txBody>
+          <a:bodyPr wrap="square" lIns="0" tIns="0" rIns="0" bIns="0" rtlCol="0" anchor="t"/>
+          <a:lstStyle/>
+          <a:p>
+            <a:pPr algn="l" indent="0" marL="0">
+              <a:lnSpc>
+                <a:spcPts val="2613"/>
+              </a:lnSpc>
+              <a:buNone/>
+            </a:pPr>
+            <a:r>
+              <a:rPr lang="en-US" sz="1866" b="1" dirty="0">
+                <a:solidFill>
+                  <a:srgbClr val="FFFFFF"/>
+                </a:solidFill>
+                <a:latin typeface="Inter" pitchFamily="34" charset="0"/>
+                <a:ea typeface="Inter" pitchFamily="34" charset="-122"/>
+                <a:cs typeface="Inter" pitchFamily="34" charset="-120"/>
+              </a:rPr>
+              <a:t>Request routing and per-slice telemetry</a:t>
+            </a:r>
+            <a:endParaRPr lang="en-US" sz="1866" dirty="0"/>
+          </a:p>
+        </p:txBody>
+      </p:sp>
+      <p:sp>
+        <p:nvSpPr>
+          <p:cNvPr id="36" name="Text 34"/>
+          <p:cNvSpPr/>
+          <p:nvPr/>
+        </p:nvSpPr>
+        <p:spPr>
+          <a:xfrm>
+            <a:off x="507873" y="5735637"/>
+            <a:ext cx="11173206" cy="715963"/>
+          </a:xfrm>
+          <a:prstGeom prst="rect">
+            <a:avLst/>
+          </a:prstGeom>
+          <a:solidFill>
+            <a:srgbClr val="E8A317"/>
+          </a:solidFill>
+          <a:ln/>
+        </p:spPr>
+        <p:txBody>
+          <a:bodyPr wrap="square" rtlCol="0" anchor="ctr"/>
+          <a:lstStyle/>
+          <a:p>
+            <a:pPr indent="0" marL="0">
+              <a:buNone/>
+            </a:pPr>
+            <a:endParaRPr lang="en-US" dirty="0"/>
+          </a:p>
+        </p:txBody>
+      </p:sp>
+      <p:sp>
+        <p:nvSpPr>
+          <p:cNvPr id="37" name="Text 35"/>
+          <p:cNvSpPr/>
+          <p:nvPr/>
+        </p:nvSpPr>
+        <p:spPr>
+          <a:xfrm>
+            <a:off x="778672" y="5921772"/>
+            <a:ext cx="10844239" cy="343694"/>
+          </a:xfrm>
+          <a:prstGeom prst="rect">
+            <a:avLst/>
+          </a:prstGeom>
+          <a:noFill/>
+          <a:ln/>
+        </p:spPr>
+        <p:txBody>
+          <a:bodyPr wrap="square" lIns="0" tIns="0" rIns="0" bIns="0" rtlCol="0" anchor="t"/>
+          <a:lstStyle/>
+          <a:p>
+            <a:pPr algn="l" indent="0" marL="0">
+              <a:lnSpc>
+                <a:spcPts val="2706"/>
+              </a:lnSpc>
+              <a:buNone/>
+            </a:pPr>
+            <a:r>
+              <a:rPr lang="en-US" sz="1866" b="1" dirty="0">
+                <a:solidFill>
+                  <a:srgbClr val="2A2D34"/>
+                </a:solidFill>
+                <a:latin typeface="Inter" pitchFamily="34" charset="0"/>
+                <a:ea typeface="Inter" pitchFamily="34" charset="-122"/>
+                <a:cs typeface="Inter" pitchFamily="34" charset="-120"/>
+              </a:rPr>
+              <a:t>Only one of the three undoes a release by deploying again. The other two undo it by routing.</a:t>
+            </a:r>
+            <a:endParaRPr lang="en-US" sz="1866" dirty="0"/>
+          </a:p>
+        </p:txBody>
+      </p:sp>
     </p:spTree>
   </p:cSld>
   <p:clrMapOvr>
@@ -1308,6 +3196,13 @@
 <file path=ppt/slides/slide3.xml><?xml version="1.0" encoding="utf-8"?>
 <p:sld xmlns:a="http://schemas.openxmlformats.org/drawingml/2006/main" xmlns:r="http://schemas.openxmlformats.org/officeDocument/2006/relationships" xmlns:p="http://schemas.openxmlformats.org/presentationml/2006/main">
   <p:cSld name="Slide 3">
+    <p:bg>
+      <p:bgPr>
+        <a:solidFill>
+          <a:srgbClr val="FFFFFF"/>
+        </a:solidFill>
+      </p:bgPr>
+    </p:bg>
     <p:spTree>
       <p:nvGrpSpPr>
         <p:cNvPr id="1" name=""/>
@@ -1322,30 +3217,798 @@
           <a:chExt cx="0" cy="0"/>
         </a:xfrm>
       </p:grpSpPr>
-      <p:pic>
-        <p:nvPicPr>
-          <p:cNvPr id="2" name="Image 0" descr="/tmp/slide-1787840594758-irhcfjpm1q.png">    </p:cNvPr>
-          <p:cNvPicPr>
-            <a:picLocks noChangeAspect="1"/>
-          </p:cNvPicPr>
-          <p:nvPr/>
-        </p:nvPicPr>
-        <p:blipFill>
-          <a:blip r:embed="rId1"/>
-          <a:stretch>
-            <a:fillRect/>
-          </a:stretch>
-        </p:blipFill>
-        <p:spPr>
-          <a:xfrm>
-            <a:off x="0" y="0"/>
-            <a:ext cx="12188952" cy="6858000"/>
-          </a:xfrm>
-          <a:prstGeom prst="rect">
-            <a:avLst/>
-          </a:prstGeom>
-        </p:spPr>
-      </p:pic>
+      <p:sp>
+        <p:nvSpPr>
+          <p:cNvPr id="2" name="Text 0"/>
+          <p:cNvSpPr/>
+          <p:nvPr/>
+        </p:nvSpPr>
+        <p:spPr>
+          <a:xfrm>
+            <a:off x="507873" y="457200"/>
+            <a:ext cx="7922831" cy="528241"/>
+          </a:xfrm>
+          <a:prstGeom prst="rect">
+            <a:avLst/>
+          </a:prstGeom>
+          <a:noFill/>
+          <a:ln/>
+        </p:spPr>
+        <p:txBody>
+          <a:bodyPr wrap="square" lIns="0" tIns="0" rIns="0" bIns="0" rtlCol="0" anchor="t"/>
+          <a:lstStyle/>
+          <a:p>
+            <a:pPr algn="l" indent="0" marL="0">
+              <a:lnSpc>
+                <a:spcPts val="4159"/>
+              </a:lnSpc>
+              <a:buNone/>
+            </a:pPr>
+            <a:r>
+              <a:rPr lang="en-US" sz="3200" b="1" dirty="0">
+                <a:solidFill>
+                  <a:srgbClr val="2A2D34"/>
+                </a:solidFill>
+                <a:latin typeface="Archivo" pitchFamily="34" charset="0"/>
+                <a:ea typeface="Archivo" pitchFamily="34" charset="-122"/>
+                <a:cs typeface="Archivo" pitchFamily="34" charset="-120"/>
+              </a:rPr>
+              <a:t>The two questions that actually decide it</a:t>
+            </a:r>
+            <a:endParaRPr lang="en-US" sz="3200" dirty="0"/>
+          </a:p>
+        </p:txBody>
+      </p:sp>
+      <p:sp>
+        <p:nvSpPr>
+          <p:cNvPr id="3" name="Text 1"/>
+          <p:cNvSpPr/>
+          <p:nvPr/>
+        </p:nvSpPr>
+        <p:spPr>
+          <a:xfrm>
+            <a:off x="11223993" y="492720"/>
+            <a:ext cx="457086" cy="457200"/>
+          </a:xfrm>
+          <a:prstGeom prst="rect">
+            <a:avLst/>
+          </a:prstGeom>
+          <a:solidFill>
+            <a:srgbClr val="2A2D34"/>
+          </a:solidFill>
+          <a:ln/>
+        </p:spPr>
+        <p:txBody>
+          <a:bodyPr wrap="square" rtlCol="0" anchor="ctr"/>
+          <a:lstStyle/>
+          <a:p>
+            <a:pPr indent="0" marL="0">
+              <a:buNone/>
+            </a:pPr>
+            <a:endParaRPr lang="en-US" dirty="0"/>
+          </a:p>
+        </p:txBody>
+      </p:sp>
+      <p:sp>
+        <p:nvSpPr>
+          <p:cNvPr id="4" name="Text 2"/>
+          <p:cNvSpPr/>
+          <p:nvPr/>
+        </p:nvSpPr>
+        <p:spPr>
+          <a:xfrm>
+            <a:off x="11312871" y="567333"/>
+            <a:ext cx="284917" cy="307975"/>
+          </a:xfrm>
+          <a:prstGeom prst="rect">
+            <a:avLst/>
+          </a:prstGeom>
+          <a:noFill/>
+          <a:ln/>
+        </p:spPr>
+        <p:txBody>
+          <a:bodyPr wrap="square" lIns="0" tIns="0" rIns="0" bIns="0" rtlCol="0" anchor="t"/>
+          <a:lstStyle/>
+          <a:p>
+            <a:pPr algn="l" indent="0" marL="0">
+              <a:lnSpc>
+                <a:spcPts val="2426"/>
+              </a:lnSpc>
+              <a:buNone/>
+            </a:pPr>
+            <a:r>
+              <a:rPr lang="en-US" sz="1733" b="1" dirty="0">
+                <a:solidFill>
+                  <a:srgbClr val="FFFFFF"/>
+                </a:solidFill>
+                <a:latin typeface="Archivo" pitchFamily="34" charset="0"/>
+                <a:ea typeface="Archivo" pitchFamily="34" charset="-122"/>
+                <a:cs typeface="Archivo" pitchFamily="34" charset="-120"/>
+              </a:rPr>
+              <a:t>03</a:t>
+            </a:r>
+            <a:endParaRPr lang="en-US" sz="1733" dirty="0"/>
+          </a:p>
+        </p:txBody>
+      </p:sp>
+      <p:sp>
+        <p:nvSpPr>
+          <p:cNvPr id="5" name="Text 3"/>
+          <p:cNvSpPr/>
+          <p:nvPr/>
+        </p:nvSpPr>
+        <p:spPr>
+          <a:xfrm>
+            <a:off x="2810164" y="1222375"/>
+            <a:ext cx="4472465" cy="236934"/>
+          </a:xfrm>
+          <a:prstGeom prst="rect">
+            <a:avLst/>
+          </a:prstGeom>
+          <a:noFill/>
+          <a:ln/>
+        </p:spPr>
+        <p:txBody>
+          <a:bodyPr wrap="square" lIns="0" tIns="0" rIns="0" bIns="0" rtlCol="0" anchor="t"/>
+          <a:lstStyle/>
+          <a:p>
+            <a:pPr algn="l" indent="0" marL="0">
+              <a:lnSpc>
+                <a:spcPts val="1866"/>
+              </a:lnSpc>
+              <a:buNone/>
+            </a:pPr>
+            <a:r>
+              <a:rPr lang="en-US" sz="1333" b="1" dirty="0">
+                <a:solidFill>
+                  <a:srgbClr val="6B6F76"/>
+                </a:solidFill>
+                <a:latin typeface="Inter" pitchFamily="34" charset="0"/>
+                <a:ea typeface="Inter" pitchFamily="34" charset="-122"/>
+                <a:cs typeface="Inter" pitchFamily="34" charset="-120"/>
+              </a:rPr>
+              <a:t>TRAFFIC CANNOT BE SPLIT BY REQUEST</a:t>
+            </a:r>
+            <a:endParaRPr lang="en-US" sz="1333" dirty="0"/>
+          </a:p>
+        </p:txBody>
+      </p:sp>
+      <p:sp>
+        <p:nvSpPr>
+          <p:cNvPr id="6" name="Text 4"/>
+          <p:cNvSpPr/>
+          <p:nvPr/>
+        </p:nvSpPr>
+        <p:spPr>
+          <a:xfrm>
+            <a:off x="7296508" y="1222375"/>
+            <a:ext cx="4472465" cy="236934"/>
+          </a:xfrm>
+          <a:prstGeom prst="rect">
+            <a:avLst/>
+          </a:prstGeom>
+          <a:noFill/>
+          <a:ln/>
+        </p:spPr>
+        <p:txBody>
+          <a:bodyPr wrap="square" lIns="0" tIns="0" rIns="0" bIns="0" rtlCol="0" anchor="t"/>
+          <a:lstStyle/>
+          <a:p>
+            <a:pPr algn="l" indent="0" marL="0">
+              <a:lnSpc>
+                <a:spcPts val="1866"/>
+              </a:lnSpc>
+              <a:buNone/>
+            </a:pPr>
+            <a:r>
+              <a:rPr lang="en-US" sz="1333" b="1" dirty="0">
+                <a:solidFill>
+                  <a:srgbClr val="6B6F76"/>
+                </a:solidFill>
+                <a:latin typeface="Inter" pitchFamily="34" charset="0"/>
+                <a:ea typeface="Inter" pitchFamily="34" charset="-122"/>
+                <a:cs typeface="Inter" pitchFamily="34" charset="-120"/>
+              </a:rPr>
+              <a:t>TRAFFIC CAN BE SPLIT BY REQUEST</a:t>
+            </a:r>
+            <a:endParaRPr lang="en-US" sz="1333" dirty="0"/>
+          </a:p>
+        </p:txBody>
+      </p:sp>
+      <p:sp>
+        <p:nvSpPr>
+          <p:cNvPr id="7" name="Text 5"/>
+          <p:cNvSpPr/>
+          <p:nvPr/>
+        </p:nvSpPr>
+        <p:spPr>
+          <a:xfrm>
+            <a:off x="463859" y="2359223"/>
+            <a:ext cx="2244731" cy="507603"/>
+          </a:xfrm>
+          <a:prstGeom prst="rect">
+            <a:avLst/>
+          </a:prstGeom>
+          <a:noFill/>
+          <a:ln/>
+        </p:spPr>
+        <p:txBody>
+          <a:bodyPr wrap="square" lIns="0" tIns="0" rIns="0" bIns="0" rtlCol="0" anchor="t"/>
+          <a:lstStyle/>
+          <a:p>
+            <a:pPr algn="r" indent="0" marL="0">
+              <a:lnSpc>
+                <a:spcPts val="2000"/>
+              </a:lnSpc>
+              <a:buNone/>
+            </a:pPr>
+            <a:r>
+              <a:rPr lang="en-US" sz="1333" b="1" dirty="0">
+                <a:solidFill>
+                  <a:srgbClr val="6B6F76"/>
+                </a:solidFill>
+                <a:latin typeface="Inter" pitchFamily="34" charset="0"/>
+                <a:ea typeface="Inter" pitchFamily="34" charset="-122"/>
+                <a:cs typeface="Inter" pitchFamily="34" charset="-120"/>
+              </a:rPr>
+              <a:t>A BAD RELEASE MUST STOP AT ONCE</a:t>
+            </a:r>
+            <a:endParaRPr lang="en-US" sz="1333" dirty="0"/>
+          </a:p>
+        </p:txBody>
+      </p:sp>
+      <p:sp>
+        <p:nvSpPr>
+          <p:cNvPr id="8" name="Text 6"/>
+          <p:cNvSpPr/>
+          <p:nvPr/>
+        </p:nvSpPr>
+        <p:spPr>
+          <a:xfrm>
+            <a:off x="463859" y="4531122"/>
+            <a:ext cx="2244731" cy="507603"/>
+          </a:xfrm>
+          <a:prstGeom prst="rect">
+            <a:avLst/>
+          </a:prstGeom>
+          <a:noFill/>
+          <a:ln/>
+        </p:spPr>
+        <p:txBody>
+          <a:bodyPr wrap="square" lIns="0" tIns="0" rIns="0" bIns="0" rtlCol="0" anchor="t"/>
+          <a:lstStyle/>
+          <a:p>
+            <a:pPr algn="r" indent="0" marL="0">
+              <a:lnSpc>
+                <a:spcPts val="2000"/>
+              </a:lnSpc>
+              <a:buNone/>
+            </a:pPr>
+            <a:r>
+              <a:rPr lang="en-US" sz="1333" b="1" dirty="0">
+                <a:solidFill>
+                  <a:srgbClr val="6B6F76"/>
+                </a:solidFill>
+                <a:latin typeface="Inter" pitchFamily="34" charset="0"/>
+                <a:ea typeface="Inter" pitchFamily="34" charset="-122"/>
+                <a:cs typeface="Inter" pitchFamily="34" charset="-120"/>
+              </a:rPr>
+              <a:t>A BAD RELEASE CAN WAIT FOR A REDEPLOY</a:t>
+            </a:r>
+            <a:endParaRPr lang="en-US" sz="1333" dirty="0"/>
+          </a:p>
+        </p:txBody>
+      </p:sp>
+      <p:sp>
+        <p:nvSpPr>
+          <p:cNvPr id="9" name="Text 7"/>
+          <p:cNvSpPr/>
+          <p:nvPr/>
+        </p:nvSpPr>
+        <p:spPr>
+          <a:xfrm>
+            <a:off x="2810164" y="1560909"/>
+            <a:ext cx="4401632" cy="2104231"/>
+          </a:xfrm>
+          <a:prstGeom prst="rect">
+            <a:avLst/>
+          </a:prstGeom>
+          <a:solidFill>
+            <a:srgbClr val="1F8A82"/>
+          </a:solidFill>
+          <a:ln/>
+        </p:spPr>
+        <p:txBody>
+          <a:bodyPr wrap="square" rtlCol="0" anchor="ctr"/>
+          <a:lstStyle/>
+          <a:p>
+            <a:pPr indent="0" marL="0">
+              <a:buNone/>
+            </a:pPr>
+            <a:endParaRPr lang="en-US" dirty="0"/>
+          </a:p>
+        </p:txBody>
+      </p:sp>
+      <p:sp>
+        <p:nvSpPr>
+          <p:cNvPr id="10" name="Text 8"/>
+          <p:cNvSpPr/>
+          <p:nvPr/>
+        </p:nvSpPr>
+        <p:spPr>
+          <a:xfrm>
+            <a:off x="3047040" y="1852612"/>
+            <a:ext cx="4006439" cy="423267"/>
+          </a:xfrm>
+          <a:prstGeom prst="rect">
+            <a:avLst/>
+          </a:prstGeom>
+          <a:noFill/>
+          <a:ln/>
+        </p:spPr>
+        <p:txBody>
+          <a:bodyPr wrap="square" lIns="0" tIns="0" rIns="0" bIns="0" rtlCol="0" anchor="t"/>
+          <a:lstStyle/>
+          <a:p>
+            <a:pPr algn="l" indent="0" marL="0">
+              <a:lnSpc>
+                <a:spcPts val="3333"/>
+              </a:lnSpc>
+              <a:buNone/>
+            </a:pPr>
+            <a:r>
+              <a:rPr lang="en-US" sz="2666" b="1" dirty="0">
+                <a:solidFill>
+                  <a:srgbClr val="FFFFFF"/>
+                </a:solidFill>
+                <a:latin typeface="Archivo" pitchFamily="34" charset="0"/>
+                <a:ea typeface="Archivo" pitchFamily="34" charset="-122"/>
+                <a:cs typeface="Archivo" pitchFamily="34" charset="-120"/>
+              </a:rPr>
+              <a:t>Blue-green</a:t>
+            </a:r>
+            <a:endParaRPr lang="en-US" sz="2666" dirty="0"/>
+          </a:p>
+        </p:txBody>
+      </p:sp>
+      <p:sp>
+        <p:nvSpPr>
+          <p:cNvPr id="11" name="Text 9"/>
+          <p:cNvSpPr/>
+          <p:nvPr/>
+        </p:nvSpPr>
+        <p:spPr>
+          <a:xfrm>
+            <a:off x="3047040" y="2377480"/>
+            <a:ext cx="4006439" cy="995958"/>
+          </a:xfrm>
+          <a:prstGeom prst="rect">
+            <a:avLst/>
+          </a:prstGeom>
+          <a:noFill/>
+          <a:ln/>
+        </p:spPr>
+        <p:txBody>
+          <a:bodyPr wrap="square" lIns="0" tIns="0" rIns="0" bIns="0" rtlCol="0" anchor="t"/>
+          <a:lstStyle/>
+          <a:p>
+            <a:pPr algn="l" indent="0" marL="0">
+              <a:lnSpc>
+                <a:spcPts val="2613"/>
+              </a:lnSpc>
+              <a:spcBef>
+                <a:spcPts val="800"/>
+              </a:spcBef>
+              <a:buNone/>
+            </a:pPr>
+            <a:r>
+              <a:rPr lang="en-US" sz="1866" dirty="0">
+                <a:solidFill>
+                  <a:srgbClr val="FFFFFF"/>
+                </a:solidFill>
+                <a:latin typeface="Inter" pitchFamily="34" charset="0"/>
+                <a:ea typeface="Inter" pitchFamily="34" charset="-122"/>
+                <a:cs typeface="Inter" pitchFamily="34" charset="-120"/>
+              </a:rPr>
+              <a:t>Stopping at once needs a switch. A switch does not need per-request routing.</a:t>
+            </a:r>
+            <a:endParaRPr lang="en-US" sz="1866" dirty="0"/>
+          </a:p>
+        </p:txBody>
+      </p:sp>
+      <p:sp>
+        <p:nvSpPr>
+          <p:cNvPr id="12" name="Text 10"/>
+          <p:cNvSpPr/>
+          <p:nvPr/>
+        </p:nvSpPr>
+        <p:spPr>
+          <a:xfrm>
+            <a:off x="7279447" y="1560909"/>
+            <a:ext cx="4401632" cy="2104231"/>
+          </a:xfrm>
+          <a:prstGeom prst="rect">
+            <a:avLst/>
+          </a:prstGeom>
+          <a:solidFill>
+            <a:srgbClr val="E8A317"/>
+          </a:solidFill>
+          <a:ln/>
+        </p:spPr>
+        <p:txBody>
+          <a:bodyPr wrap="square" rtlCol="0" anchor="ctr"/>
+          <a:lstStyle/>
+          <a:p>
+            <a:pPr indent="0" marL="0">
+              <a:buNone/>
+            </a:pPr>
+            <a:endParaRPr lang="en-US" dirty="0"/>
+          </a:p>
+        </p:txBody>
+      </p:sp>
+      <p:sp>
+        <p:nvSpPr>
+          <p:cNvPr id="13" name="Text 11"/>
+          <p:cNvSpPr/>
+          <p:nvPr/>
+        </p:nvSpPr>
+        <p:spPr>
+          <a:xfrm>
+            <a:off x="7516322" y="1852612"/>
+            <a:ext cx="4006439" cy="423267"/>
+          </a:xfrm>
+          <a:prstGeom prst="rect">
+            <a:avLst/>
+          </a:prstGeom>
+          <a:noFill/>
+          <a:ln/>
+        </p:spPr>
+        <p:txBody>
+          <a:bodyPr wrap="square" lIns="0" tIns="0" rIns="0" bIns="0" rtlCol="0" anchor="t"/>
+          <a:lstStyle/>
+          <a:p>
+            <a:pPr algn="l" indent="0" marL="0">
+              <a:lnSpc>
+                <a:spcPts val="3333"/>
+              </a:lnSpc>
+              <a:buNone/>
+            </a:pPr>
+            <a:r>
+              <a:rPr lang="en-US" sz="2666" b="1" dirty="0">
+                <a:solidFill>
+                  <a:srgbClr val="2A2D34"/>
+                </a:solidFill>
+                <a:latin typeface="Archivo" pitchFamily="34" charset="0"/>
+                <a:ea typeface="Archivo" pitchFamily="34" charset="-122"/>
+                <a:cs typeface="Archivo" pitchFamily="34" charset="-120"/>
+              </a:rPr>
+              <a:t>Canary</a:t>
+            </a:r>
+            <a:endParaRPr lang="en-US" sz="2666" dirty="0"/>
+          </a:p>
+        </p:txBody>
+      </p:sp>
+      <p:sp>
+        <p:nvSpPr>
+          <p:cNvPr id="14" name="Text 12"/>
+          <p:cNvSpPr/>
+          <p:nvPr/>
+        </p:nvSpPr>
+        <p:spPr>
+          <a:xfrm>
+            <a:off x="7516322" y="2377480"/>
+            <a:ext cx="4006439" cy="995958"/>
+          </a:xfrm>
+          <a:prstGeom prst="rect">
+            <a:avLst/>
+          </a:prstGeom>
+          <a:noFill/>
+          <a:ln/>
+        </p:spPr>
+        <p:txBody>
+          <a:bodyPr wrap="square" lIns="0" tIns="0" rIns="0" bIns="0" rtlCol="0" anchor="t"/>
+          <a:lstStyle/>
+          <a:p>
+            <a:pPr algn="l" indent="0" marL="0">
+              <a:lnSpc>
+                <a:spcPts val="2613"/>
+              </a:lnSpc>
+              <a:spcBef>
+                <a:spcPts val="800"/>
+              </a:spcBef>
+              <a:buNone/>
+            </a:pPr>
+            <a:r>
+              <a:rPr lang="en-US" sz="1866" dirty="0">
+                <a:solidFill>
+                  <a:srgbClr val="2A2D34"/>
+                </a:solidFill>
+                <a:latin typeface="Inter" pitchFamily="34" charset="0"/>
+                <a:ea typeface="Inter" pitchFamily="34" charset="-122"/>
+                <a:cs typeface="Inter" pitchFamily="34" charset="-120"/>
+              </a:rPr>
+              <a:t>Both answers demanded. Exposure is bought a slice at a time, and withdrawn the same way.</a:t>
+            </a:r>
+            <a:endParaRPr lang="en-US" sz="1866" dirty="0"/>
+          </a:p>
+        </p:txBody>
+      </p:sp>
+      <p:sp>
+        <p:nvSpPr>
+          <p:cNvPr id="15" name="Text 13"/>
+          <p:cNvSpPr/>
+          <p:nvPr/>
+        </p:nvSpPr>
+        <p:spPr>
+          <a:xfrm>
+            <a:off x="2810164" y="3732808"/>
+            <a:ext cx="4401632" cy="2104231"/>
+          </a:xfrm>
+          <a:prstGeom prst="rect">
+            <a:avLst/>
+          </a:prstGeom>
+          <a:solidFill>
+            <a:srgbClr val="2A2D34"/>
+          </a:solidFill>
+          <a:ln/>
+        </p:spPr>
+        <p:txBody>
+          <a:bodyPr wrap="square" rtlCol="0" anchor="ctr"/>
+          <a:lstStyle/>
+          <a:p>
+            <a:pPr indent="0" marL="0">
+              <a:buNone/>
+            </a:pPr>
+            <a:endParaRPr lang="en-US" dirty="0"/>
+          </a:p>
+        </p:txBody>
+      </p:sp>
+      <p:sp>
+        <p:nvSpPr>
+          <p:cNvPr id="16" name="Text 14"/>
+          <p:cNvSpPr/>
+          <p:nvPr/>
+        </p:nvSpPr>
+        <p:spPr>
+          <a:xfrm>
+            <a:off x="3047040" y="4024511"/>
+            <a:ext cx="4006439" cy="423267"/>
+          </a:xfrm>
+          <a:prstGeom prst="rect">
+            <a:avLst/>
+          </a:prstGeom>
+          <a:noFill/>
+          <a:ln/>
+        </p:spPr>
+        <p:txBody>
+          <a:bodyPr wrap="square" lIns="0" tIns="0" rIns="0" bIns="0" rtlCol="0" anchor="t"/>
+          <a:lstStyle/>
+          <a:p>
+            <a:pPr algn="l" indent="0" marL="0">
+              <a:lnSpc>
+                <a:spcPts val="3333"/>
+              </a:lnSpc>
+              <a:buNone/>
+            </a:pPr>
+            <a:r>
+              <a:rPr lang="en-US" sz="2666" b="1" dirty="0">
+                <a:solidFill>
+                  <a:srgbClr val="FFFFFF"/>
+                </a:solidFill>
+                <a:latin typeface="Archivo" pitchFamily="34" charset="0"/>
+                <a:ea typeface="Archivo" pitchFamily="34" charset="-122"/>
+                <a:cs typeface="Archivo" pitchFamily="34" charset="-120"/>
+              </a:rPr>
+              <a:t>Rolling</a:t>
+            </a:r>
+            <a:endParaRPr lang="en-US" sz="2666" dirty="0"/>
+          </a:p>
+        </p:txBody>
+      </p:sp>
+      <p:sp>
+        <p:nvSpPr>
+          <p:cNvPr id="17" name="Text 15"/>
+          <p:cNvSpPr/>
+          <p:nvPr/>
+        </p:nvSpPr>
+        <p:spPr>
+          <a:xfrm>
+            <a:off x="3047040" y="4549378"/>
+            <a:ext cx="4006439" cy="995958"/>
+          </a:xfrm>
+          <a:prstGeom prst="rect">
+            <a:avLst/>
+          </a:prstGeom>
+          <a:noFill/>
+          <a:ln/>
+        </p:spPr>
+        <p:txBody>
+          <a:bodyPr wrap="square" lIns="0" tIns="0" rIns="0" bIns="0" rtlCol="0" anchor="t"/>
+          <a:lstStyle/>
+          <a:p>
+            <a:pPr algn="l" indent="0" marL="0">
+              <a:lnSpc>
+                <a:spcPts val="2613"/>
+              </a:lnSpc>
+              <a:spcBef>
+                <a:spcPts val="800"/>
+              </a:spcBef>
+              <a:buNone/>
+            </a:pPr>
+            <a:r>
+              <a:rPr lang="en-US" sz="1866" dirty="0">
+                <a:solidFill>
+                  <a:srgbClr val="FFFFFF"/>
+                </a:solidFill>
+                <a:latin typeface="Inter" pitchFamily="34" charset="0"/>
+                <a:ea typeface="Inter" pitchFamily="34" charset="-122"/>
+                <a:cs typeface="Inter" pitchFamily="34" charset="-120"/>
+              </a:rPr>
+              <a:t>If a redeploy is a fast enough exit, one fleet does it and nothing else is needed.</a:t>
+            </a:r>
+            <a:endParaRPr lang="en-US" sz="1866" dirty="0"/>
+          </a:p>
+        </p:txBody>
+      </p:sp>
+      <p:sp>
+        <p:nvSpPr>
+          <p:cNvPr id="18" name="Text 16"/>
+          <p:cNvSpPr/>
+          <p:nvPr/>
+        </p:nvSpPr>
+        <p:spPr>
+          <a:xfrm>
+            <a:off x="7279447" y="3732808"/>
+            <a:ext cx="4401632" cy="2104231"/>
+          </a:xfrm>
+          <a:prstGeom prst="rect">
+            <a:avLst/>
+          </a:prstGeom>
+          <a:solidFill>
+            <a:srgbClr val="2A2D34"/>
+          </a:solidFill>
+          <a:ln/>
+        </p:spPr>
+        <p:txBody>
+          <a:bodyPr wrap="square" rtlCol="0" anchor="ctr"/>
+          <a:lstStyle/>
+          <a:p>
+            <a:pPr indent="0" marL="0">
+              <a:buNone/>
+            </a:pPr>
+            <a:endParaRPr lang="en-US" dirty="0"/>
+          </a:p>
+        </p:txBody>
+      </p:sp>
+      <p:sp>
+        <p:nvSpPr>
+          <p:cNvPr id="19" name="Text 17"/>
+          <p:cNvSpPr/>
+          <p:nvPr/>
+        </p:nvSpPr>
+        <p:spPr>
+          <a:xfrm>
+            <a:off x="7516322" y="4024511"/>
+            <a:ext cx="4006439" cy="423267"/>
+          </a:xfrm>
+          <a:prstGeom prst="rect">
+            <a:avLst/>
+          </a:prstGeom>
+          <a:noFill/>
+          <a:ln/>
+        </p:spPr>
+        <p:txBody>
+          <a:bodyPr wrap="square" lIns="0" tIns="0" rIns="0" bIns="0" rtlCol="0" anchor="t"/>
+          <a:lstStyle/>
+          <a:p>
+            <a:pPr algn="l" indent="0" marL="0">
+              <a:lnSpc>
+                <a:spcPts val="3333"/>
+              </a:lnSpc>
+              <a:buNone/>
+            </a:pPr>
+            <a:r>
+              <a:rPr lang="en-US" sz="2666" b="1" dirty="0">
+                <a:solidFill>
+                  <a:srgbClr val="FFFFFF"/>
+                </a:solidFill>
+                <a:latin typeface="Archivo" pitchFamily="34" charset="0"/>
+                <a:ea typeface="Archivo" pitchFamily="34" charset="-122"/>
+                <a:cs typeface="Archivo" pitchFamily="34" charset="-120"/>
+              </a:rPr>
+              <a:t>Rolling, still</a:t>
+            </a:r>
+            <a:endParaRPr lang="en-US" sz="2666" dirty="0"/>
+          </a:p>
+        </p:txBody>
+      </p:sp>
+      <p:sp>
+        <p:nvSpPr>
+          <p:cNvPr id="20" name="Text 18"/>
+          <p:cNvSpPr/>
+          <p:nvPr/>
+        </p:nvSpPr>
+        <p:spPr>
+          <a:xfrm>
+            <a:off x="7516322" y="4549378"/>
+            <a:ext cx="4006439" cy="995958"/>
+          </a:xfrm>
+          <a:prstGeom prst="rect">
+            <a:avLst/>
+          </a:prstGeom>
+          <a:noFill/>
+          <a:ln/>
+        </p:spPr>
+        <p:txBody>
+          <a:bodyPr wrap="square" lIns="0" tIns="0" rIns="0" bIns="0" rtlCol="0" anchor="t"/>
+          <a:lstStyle/>
+          <a:p>
+            <a:pPr algn="l" indent="0" marL="0">
+              <a:lnSpc>
+                <a:spcPts val="2613"/>
+              </a:lnSpc>
+              <a:spcBef>
+                <a:spcPts val="800"/>
+              </a:spcBef>
+              <a:buNone/>
+            </a:pPr>
+            <a:r>
+              <a:rPr lang="en-US" sz="1866" dirty="0">
+                <a:solidFill>
+                  <a:srgbClr val="FFFFFF"/>
+                </a:solidFill>
+                <a:latin typeface="Inter" pitchFamily="34" charset="0"/>
+                <a:ea typeface="Inter" pitchFamily="34" charset="-122"/>
+                <a:cs typeface="Inter" pitchFamily="34" charset="-120"/>
+              </a:rPr>
+              <a:t>Splitting traffic buys staged exposure, not a faster exit. It does not decide this alone.</a:t>
+            </a:r>
+            <a:endParaRPr lang="en-US" sz="1866" dirty="0"/>
+          </a:p>
+        </p:txBody>
+      </p:sp>
+      <p:sp>
+        <p:nvSpPr>
+          <p:cNvPr id="21" name="Text 19"/>
+          <p:cNvSpPr/>
+          <p:nvPr/>
+        </p:nvSpPr>
+        <p:spPr>
+          <a:xfrm>
+            <a:off x="507873" y="6006306"/>
+            <a:ext cx="11396670" cy="343694"/>
+          </a:xfrm>
+          <a:prstGeom prst="rect">
+            <a:avLst/>
+          </a:prstGeom>
+          <a:noFill/>
+          <a:ln/>
+        </p:spPr>
+        <p:txBody>
+          <a:bodyPr wrap="square" lIns="0" tIns="0" rIns="0" bIns="0" rtlCol="0" anchor="t"/>
+          <a:lstStyle/>
+          <a:p>
+            <a:pPr algn="l" indent="0" marL="0">
+              <a:lnSpc>
+                <a:spcPts val="2706"/>
+              </a:lnSpc>
+              <a:buNone/>
+            </a:pPr>
+            <a:r>
+              <a:rPr lang="en-US" sz="1866" b="1" dirty="0">
+                <a:solidFill>
+                  <a:srgbClr val="2A2D34"/>
+                </a:solidFill>
+                <a:latin typeface="Inter" pitchFamily="34" charset="0"/>
+                <a:ea typeface="Inter" pitchFamily="34" charset="-122"/>
+                <a:cs typeface="Inter" pitchFamily="34" charset="-120"/>
+              </a:rPr>
+              <a:t>Amber marks the most demanding cell here, not the best strategy.</a:t>
+            </a:r>
+            <a:endParaRPr lang="en-US" sz="1866" dirty="0"/>
+          </a:p>
+        </p:txBody>
+      </p:sp>
     </p:spTree>
   </p:cSld>
   <p:clrMapOvr>
@@ -1357,6 +4020,13 @@
 <file path=ppt/slides/slide4.xml><?xml version="1.0" encoding="utf-8"?>
 <p:sld xmlns:a="http://schemas.openxmlformats.org/drawingml/2006/main" xmlns:r="http://schemas.openxmlformats.org/officeDocument/2006/relationships" xmlns:p="http://schemas.openxmlformats.org/presentationml/2006/main">
   <p:cSld name="Slide 4">
+    <p:bg>
+      <p:bgPr>
+        <a:solidFill>
+          <a:srgbClr val="FFFFFF"/>
+        </a:solidFill>
+      </p:bgPr>
+    </p:bg>
     <p:spTree>
       <p:nvGrpSpPr>
         <p:cNvPr id="1" name=""/>
@@ -1371,30 +4041,855 @@
           <a:chExt cx="0" cy="0"/>
         </a:xfrm>
       </p:grpSpPr>
-      <p:pic>
-        <p:nvPicPr>
-          <p:cNvPr id="2" name="Image 0" descr="/tmp/slide-1787840595026-h2o9zrg1we.png">    </p:cNvPr>
-          <p:cNvPicPr>
-            <a:picLocks noChangeAspect="1"/>
-          </p:cNvPicPr>
-          <p:nvPr/>
-        </p:nvPicPr>
-        <p:blipFill>
-          <a:blip r:embed="rId1"/>
-          <a:stretch>
-            <a:fillRect/>
-          </a:stretch>
-        </p:blipFill>
-        <p:spPr>
-          <a:xfrm>
-            <a:off x="0" y="0"/>
-            <a:ext cx="12188952" cy="6858000"/>
-          </a:xfrm>
-          <a:prstGeom prst="rect">
-            <a:avLst/>
-          </a:prstGeom>
-        </p:spPr>
-      </p:pic>
+      <p:sp>
+        <p:nvSpPr>
+          <p:cNvPr id="2" name="Text 0"/>
+          <p:cNvSpPr/>
+          <p:nvPr/>
+        </p:nvSpPr>
+        <p:spPr>
+          <a:xfrm>
+            <a:off x="507873" y="457200"/>
+            <a:ext cx="8782235" cy="528241"/>
+          </a:xfrm>
+          <a:prstGeom prst="rect">
+            <a:avLst/>
+          </a:prstGeom>
+          <a:noFill/>
+          <a:ln/>
+        </p:spPr>
+        <p:txBody>
+          <a:bodyPr wrap="square" lIns="0" tIns="0" rIns="0" bIns="0" rtlCol="0" anchor="t"/>
+          <a:lstStyle/>
+          <a:p>
+            <a:pPr algn="l" indent="0" marL="0">
+              <a:lnSpc>
+                <a:spcPts val="4159"/>
+              </a:lnSpc>
+              <a:buNone/>
+            </a:pPr>
+            <a:r>
+              <a:rPr lang="en-US" sz="3200" b="1" dirty="0">
+                <a:solidFill>
+                  <a:srgbClr val="2A2D34"/>
+                </a:solidFill>
+                <a:latin typeface="Archivo" pitchFamily="34" charset="0"/>
+                <a:ea typeface="Archivo" pitchFamily="34" charset="-122"/>
+                <a:cs typeface="Archivo" pitchFamily="34" charset="-120"/>
+              </a:rPr>
+              <a:t>What each strategy demands before it works</a:t>
+            </a:r>
+            <a:endParaRPr lang="en-US" sz="3200" dirty="0"/>
+          </a:p>
+        </p:txBody>
+      </p:sp>
+      <p:sp>
+        <p:nvSpPr>
+          <p:cNvPr id="3" name="Text 1"/>
+          <p:cNvSpPr/>
+          <p:nvPr/>
+        </p:nvSpPr>
+        <p:spPr>
+          <a:xfrm>
+            <a:off x="11223993" y="492720"/>
+            <a:ext cx="457086" cy="457200"/>
+          </a:xfrm>
+          <a:prstGeom prst="rect">
+            <a:avLst/>
+          </a:prstGeom>
+          <a:solidFill>
+            <a:srgbClr val="2A2D34"/>
+          </a:solidFill>
+          <a:ln/>
+        </p:spPr>
+        <p:txBody>
+          <a:bodyPr wrap="square" rtlCol="0" anchor="ctr"/>
+          <a:lstStyle/>
+          <a:p>
+            <a:pPr indent="0" marL="0">
+              <a:buNone/>
+            </a:pPr>
+            <a:endParaRPr lang="en-US" dirty="0"/>
+          </a:p>
+        </p:txBody>
+      </p:sp>
+      <p:sp>
+        <p:nvSpPr>
+          <p:cNvPr id="4" name="Text 2"/>
+          <p:cNvSpPr/>
+          <p:nvPr/>
+        </p:nvSpPr>
+        <p:spPr>
+          <a:xfrm>
+            <a:off x="11312871" y="567333"/>
+            <a:ext cx="284917" cy="307975"/>
+          </a:xfrm>
+          <a:prstGeom prst="rect">
+            <a:avLst/>
+          </a:prstGeom>
+          <a:noFill/>
+          <a:ln/>
+        </p:spPr>
+        <p:txBody>
+          <a:bodyPr wrap="square" lIns="0" tIns="0" rIns="0" bIns="0" rtlCol="0" anchor="t"/>
+          <a:lstStyle/>
+          <a:p>
+            <a:pPr algn="l" indent="0" marL="0">
+              <a:lnSpc>
+                <a:spcPts val="2426"/>
+              </a:lnSpc>
+              <a:buNone/>
+            </a:pPr>
+            <a:r>
+              <a:rPr lang="en-US" sz="1733" b="1" dirty="0">
+                <a:solidFill>
+                  <a:srgbClr val="FFFFFF"/>
+                </a:solidFill>
+                <a:latin typeface="Archivo" pitchFamily="34" charset="0"/>
+                <a:ea typeface="Archivo" pitchFamily="34" charset="-122"/>
+                <a:cs typeface="Archivo" pitchFamily="34" charset="-120"/>
+              </a:rPr>
+              <a:t>04</a:t>
+            </a:r>
+            <a:endParaRPr lang="en-US" sz="1733" dirty="0"/>
+          </a:p>
+        </p:txBody>
+      </p:sp>
+      <p:sp>
+        <p:nvSpPr>
+          <p:cNvPr id="5" name="Text 3"/>
+          <p:cNvSpPr/>
+          <p:nvPr/>
+        </p:nvSpPr>
+        <p:spPr>
+          <a:xfrm>
+            <a:off x="507873" y="1222375"/>
+            <a:ext cx="2708590" cy="1470422"/>
+          </a:xfrm>
+          <a:prstGeom prst="rect">
+            <a:avLst/>
+          </a:prstGeom>
+          <a:solidFill>
+            <a:srgbClr val="2A2D34"/>
+          </a:solidFill>
+          <a:ln/>
+        </p:spPr>
+        <p:txBody>
+          <a:bodyPr wrap="square" rtlCol="0" anchor="ctr"/>
+          <a:lstStyle/>
+          <a:p>
+            <a:pPr indent="0" marL="0">
+              <a:buNone/>
+            </a:pPr>
+            <a:endParaRPr lang="en-US" dirty="0"/>
+          </a:p>
+        </p:txBody>
+      </p:sp>
+      <p:sp>
+        <p:nvSpPr>
+          <p:cNvPr id="6" name="Text 4"/>
+          <p:cNvSpPr/>
+          <p:nvPr/>
+        </p:nvSpPr>
+        <p:spPr>
+          <a:xfrm>
+            <a:off x="744748" y="1446808"/>
+            <a:ext cx="2279536" cy="690761"/>
+          </a:xfrm>
+          <a:prstGeom prst="rect">
+            <a:avLst/>
+          </a:prstGeom>
+          <a:noFill/>
+          <a:ln/>
+        </p:spPr>
+        <p:txBody>
+          <a:bodyPr wrap="square" lIns="0" tIns="0" rIns="0" bIns="0" rtlCol="0" anchor="t"/>
+          <a:lstStyle/>
+          <a:p>
+            <a:pPr algn="l" indent="0" marL="0">
+              <a:lnSpc>
+                <a:spcPts val="5439"/>
+              </a:lnSpc>
+              <a:buNone/>
+            </a:pPr>
+            <a:r>
+              <a:rPr lang="en-US" sz="4533" b="1" dirty="0">
+                <a:solidFill>
+                  <a:srgbClr val="FFFFFF"/>
+                </a:solidFill>
+                <a:latin typeface="Archivo" pitchFamily="34" charset="0"/>
+                <a:ea typeface="Archivo" pitchFamily="34" charset="-122"/>
+                <a:cs typeface="Archivo" pitchFamily="34" charset="-120"/>
+              </a:rPr>
+              <a:t>01</a:t>
+            </a:r>
+            <a:endParaRPr lang="en-US" sz="4533" dirty="0"/>
+          </a:p>
+        </p:txBody>
+      </p:sp>
+      <p:sp>
+        <p:nvSpPr>
+          <p:cNvPr id="7" name="Text 5"/>
+          <p:cNvSpPr/>
+          <p:nvPr/>
+        </p:nvSpPr>
+        <p:spPr>
+          <a:xfrm>
+            <a:off x="744748" y="2171303"/>
+            <a:ext cx="2279536" cy="297061"/>
+          </a:xfrm>
+          <a:prstGeom prst="rect">
+            <a:avLst/>
+          </a:prstGeom>
+          <a:noFill/>
+          <a:ln/>
+        </p:spPr>
+        <p:txBody>
+          <a:bodyPr wrap="square" lIns="0" tIns="0" rIns="0" bIns="0" rtlCol="0" anchor="t"/>
+          <a:lstStyle/>
+          <a:p>
+            <a:pPr algn="l" indent="0" marL="0">
+              <a:lnSpc>
+                <a:spcPts val="2340"/>
+              </a:lnSpc>
+              <a:spcBef>
+                <a:spcPts val="267"/>
+              </a:spcBef>
+              <a:buNone/>
+            </a:pPr>
+            <a:r>
+              <a:rPr lang="en-US" sz="1733" b="1" dirty="0">
+                <a:solidFill>
+                  <a:srgbClr val="FFFFFF"/>
+                </a:solidFill>
+                <a:latin typeface="Inter" pitchFamily="34" charset="0"/>
+                <a:ea typeface="Inter" pitchFamily="34" charset="-122"/>
+                <a:cs typeface="Inter" pitchFamily="34" charset="-120"/>
+              </a:rPr>
+              <a:t>HEALTH CHECKS</a:t>
+            </a:r>
+            <a:endParaRPr lang="en-US" sz="1733" dirty="0"/>
+          </a:p>
+        </p:txBody>
+      </p:sp>
+      <p:sp>
+        <p:nvSpPr>
+          <p:cNvPr id="8" name="Text 6"/>
+          <p:cNvSpPr/>
+          <p:nvPr/>
+        </p:nvSpPr>
+        <p:spPr>
+          <a:xfrm>
+            <a:off x="3588837" y="1459508"/>
+            <a:ext cx="5594931" cy="995958"/>
+          </a:xfrm>
+          <a:prstGeom prst="rect">
+            <a:avLst/>
+          </a:prstGeom>
+          <a:noFill/>
+          <a:ln/>
+        </p:spPr>
+        <p:txBody>
+          <a:bodyPr wrap="square" lIns="0" tIns="0" rIns="0" bIns="0" rtlCol="0" anchor="t"/>
+          <a:lstStyle/>
+          <a:p>
+            <a:pPr algn="l" indent="0" marL="0">
+              <a:lnSpc>
+                <a:spcPts val="2613"/>
+              </a:lnSpc>
+              <a:buNone/>
+            </a:pPr>
+            <a:r>
+              <a:rPr lang="en-US" sz="1866" dirty="0">
+                <a:solidFill>
+                  <a:srgbClr val="2A2D34"/>
+                </a:solidFill>
+                <a:latin typeface="Inter" pitchFamily="34" charset="0"/>
+                <a:ea typeface="Inter" pitchFamily="34" charset="-122"/>
+                <a:cs typeface="Inter" pitchFamily="34" charset="-120"/>
+              </a:rPr>
+              <a:t>A check that only proves the process is listening will pass a broken release — and all three strategies promote on that signal.</a:t>
+            </a:r>
+            <a:endParaRPr lang="en-US" sz="1866" dirty="0"/>
+          </a:p>
+        </p:txBody>
+      </p:sp>
+      <p:sp>
+        <p:nvSpPr>
+          <p:cNvPr id="9" name="Text 7"/>
+          <p:cNvSpPr/>
+          <p:nvPr/>
+        </p:nvSpPr>
+        <p:spPr>
+          <a:xfrm>
+            <a:off x="9446438" y="1222375"/>
+            <a:ext cx="2234641" cy="1470422"/>
+          </a:xfrm>
+          <a:prstGeom prst="rect">
+            <a:avLst/>
+          </a:prstGeom>
+          <a:solidFill>
+            <a:srgbClr val="1F8A82"/>
+          </a:solidFill>
+          <a:ln/>
+        </p:spPr>
+        <p:txBody>
+          <a:bodyPr wrap="square" rtlCol="0" anchor="ctr"/>
+          <a:lstStyle/>
+          <a:p>
+            <a:pPr indent="0" marL="0">
+              <a:buNone/>
+            </a:pPr>
+            <a:endParaRPr lang="en-US" dirty="0"/>
+          </a:p>
+        </p:txBody>
+      </p:sp>
+      <p:sp>
+        <p:nvSpPr>
+          <p:cNvPr id="10" name="Text 8"/>
+          <p:cNvSpPr/>
+          <p:nvPr/>
+        </p:nvSpPr>
+        <p:spPr>
+          <a:xfrm>
+            <a:off x="9649587" y="1703784"/>
+            <a:ext cx="1864910" cy="507603"/>
+          </a:xfrm>
+          <a:prstGeom prst="rect">
+            <a:avLst/>
+          </a:prstGeom>
+          <a:noFill/>
+          <a:ln/>
+        </p:spPr>
+        <p:txBody>
+          <a:bodyPr wrap="square" lIns="0" tIns="0" rIns="0" bIns="0" rtlCol="0" anchor="t"/>
+          <a:lstStyle/>
+          <a:p>
+            <a:pPr algn="l" indent="0" marL="0">
+              <a:lnSpc>
+                <a:spcPts val="2000"/>
+              </a:lnSpc>
+              <a:buNone/>
+            </a:pPr>
+            <a:r>
+              <a:rPr lang="en-US" sz="1333" b="1" dirty="0">
+                <a:solidFill>
+                  <a:srgbClr val="FFFFFF"/>
+                </a:solidFill>
+                <a:latin typeface="Inter" pitchFamily="34" charset="0"/>
+                <a:ea typeface="Inter" pitchFamily="34" charset="-122"/>
+                <a:cs typeface="Inter" pitchFamily="34" charset="-120"/>
+              </a:rPr>
+              <a:t>A BAD BATCH IS PROMOTED</a:t>
+            </a:r>
+            <a:endParaRPr lang="en-US" sz="1333" dirty="0"/>
+          </a:p>
+        </p:txBody>
+      </p:sp>
+      <p:sp>
+        <p:nvSpPr>
+          <p:cNvPr id="11" name="Text 9"/>
+          <p:cNvSpPr/>
+          <p:nvPr/>
+        </p:nvSpPr>
+        <p:spPr>
+          <a:xfrm>
+            <a:off x="507873" y="2794397"/>
+            <a:ext cx="2708590" cy="1470422"/>
+          </a:xfrm>
+          <a:prstGeom prst="rect">
+            <a:avLst/>
+          </a:prstGeom>
+          <a:solidFill>
+            <a:srgbClr val="E8A317"/>
+          </a:solidFill>
+          <a:ln/>
+        </p:spPr>
+        <p:txBody>
+          <a:bodyPr wrap="square" rtlCol="0" anchor="ctr"/>
+          <a:lstStyle/>
+          <a:p>
+            <a:pPr indent="0" marL="0">
+              <a:buNone/>
+            </a:pPr>
+            <a:endParaRPr lang="en-US" dirty="0"/>
+          </a:p>
+        </p:txBody>
+      </p:sp>
+      <p:sp>
+        <p:nvSpPr>
+          <p:cNvPr id="12" name="Text 10"/>
+          <p:cNvSpPr/>
+          <p:nvPr/>
+        </p:nvSpPr>
+        <p:spPr>
+          <a:xfrm>
+            <a:off x="744748" y="3018830"/>
+            <a:ext cx="2279536" cy="690761"/>
+          </a:xfrm>
+          <a:prstGeom prst="rect">
+            <a:avLst/>
+          </a:prstGeom>
+          <a:noFill/>
+          <a:ln/>
+        </p:spPr>
+        <p:txBody>
+          <a:bodyPr wrap="square" lIns="0" tIns="0" rIns="0" bIns="0" rtlCol="0" anchor="t"/>
+          <a:lstStyle/>
+          <a:p>
+            <a:pPr algn="l" indent="0" marL="0">
+              <a:lnSpc>
+                <a:spcPts val="5439"/>
+              </a:lnSpc>
+              <a:buNone/>
+            </a:pPr>
+            <a:r>
+              <a:rPr lang="en-US" sz="4533" b="1" dirty="0">
+                <a:solidFill>
+                  <a:srgbClr val="2A2D34"/>
+                </a:solidFill>
+                <a:latin typeface="Archivo" pitchFamily="34" charset="0"/>
+                <a:ea typeface="Archivo" pitchFamily="34" charset="-122"/>
+                <a:cs typeface="Archivo" pitchFamily="34" charset="-120"/>
+              </a:rPr>
+              <a:t>02</a:t>
+            </a:r>
+            <a:endParaRPr lang="en-US" sz="4533" dirty="0"/>
+          </a:p>
+        </p:txBody>
+      </p:sp>
+      <p:sp>
+        <p:nvSpPr>
+          <p:cNvPr id="13" name="Text 11"/>
+          <p:cNvSpPr/>
+          <p:nvPr/>
+        </p:nvSpPr>
+        <p:spPr>
+          <a:xfrm>
+            <a:off x="744748" y="3743325"/>
+            <a:ext cx="2279536" cy="297061"/>
+          </a:xfrm>
+          <a:prstGeom prst="rect">
+            <a:avLst/>
+          </a:prstGeom>
+          <a:noFill/>
+          <a:ln/>
+        </p:spPr>
+        <p:txBody>
+          <a:bodyPr wrap="square" lIns="0" tIns="0" rIns="0" bIns="0" rtlCol="0" anchor="t"/>
+          <a:lstStyle/>
+          <a:p>
+            <a:pPr algn="l" indent="0" marL="0">
+              <a:lnSpc>
+                <a:spcPts val="2340"/>
+              </a:lnSpc>
+              <a:spcBef>
+                <a:spcPts val="267"/>
+              </a:spcBef>
+              <a:buNone/>
+            </a:pPr>
+            <a:r>
+              <a:rPr lang="en-US" sz="1733" b="1" dirty="0">
+                <a:solidFill>
+                  <a:srgbClr val="2A2D34"/>
+                </a:solidFill>
+                <a:latin typeface="Inter" pitchFamily="34" charset="0"/>
+                <a:ea typeface="Inter" pitchFamily="34" charset="-122"/>
+                <a:cs typeface="Inter" pitchFamily="34" charset="-120"/>
+              </a:rPr>
+              <a:t>ROLLBACK</a:t>
+            </a:r>
+            <a:endParaRPr lang="en-US" sz="1733" dirty="0"/>
+          </a:p>
+        </p:txBody>
+      </p:sp>
+      <p:sp>
+        <p:nvSpPr>
+          <p:cNvPr id="14" name="Text 12"/>
+          <p:cNvSpPr/>
+          <p:nvPr/>
+        </p:nvSpPr>
+        <p:spPr>
+          <a:xfrm>
+            <a:off x="3588837" y="3031530"/>
+            <a:ext cx="5594931" cy="995958"/>
+          </a:xfrm>
+          <a:prstGeom prst="rect">
+            <a:avLst/>
+          </a:prstGeom>
+          <a:noFill/>
+          <a:ln/>
+        </p:spPr>
+        <p:txBody>
+          <a:bodyPr wrap="square" lIns="0" tIns="0" rIns="0" bIns="0" rtlCol="0" anchor="t"/>
+          <a:lstStyle/>
+          <a:p>
+            <a:pPr algn="l" indent="0" marL="0">
+              <a:lnSpc>
+                <a:spcPts val="2613"/>
+              </a:lnSpc>
+              <a:buNone/>
+            </a:pPr>
+            <a:r>
+              <a:rPr lang="en-US" sz="1866" dirty="0">
+                <a:solidFill>
+                  <a:srgbClr val="2A2D34"/>
+                </a:solidFill>
+                <a:latin typeface="Inter" pitchFamily="34" charset="0"/>
+                <a:ea typeface="Inter" pitchFamily="34" charset="-122"/>
+                <a:cs typeface="Inter" pitchFamily="34" charset="-120"/>
+              </a:rPr>
+              <a:t>A rollback path that has never been run is a plan, not a capability. The strategies differ only in how fast a working one fires.</a:t>
+            </a:r>
+            <a:endParaRPr lang="en-US" sz="1866" dirty="0"/>
+          </a:p>
+        </p:txBody>
+      </p:sp>
+      <p:sp>
+        <p:nvSpPr>
+          <p:cNvPr id="15" name="Text 13"/>
+          <p:cNvSpPr/>
+          <p:nvPr/>
+        </p:nvSpPr>
+        <p:spPr>
+          <a:xfrm>
+            <a:off x="9446438" y="2794397"/>
+            <a:ext cx="2234641" cy="1470422"/>
+          </a:xfrm>
+          <a:prstGeom prst="rect">
+            <a:avLst/>
+          </a:prstGeom>
+          <a:solidFill>
+            <a:srgbClr val="2A2D34"/>
+          </a:solidFill>
+          <a:ln/>
+        </p:spPr>
+        <p:txBody>
+          <a:bodyPr wrap="square" rtlCol="0" anchor="ctr"/>
+          <a:lstStyle/>
+          <a:p>
+            <a:pPr indent="0" marL="0">
+              <a:buNone/>
+            </a:pPr>
+            <a:endParaRPr lang="en-US" dirty="0"/>
+          </a:p>
+        </p:txBody>
+      </p:sp>
+      <p:sp>
+        <p:nvSpPr>
+          <p:cNvPr id="16" name="Text 14"/>
+          <p:cNvSpPr/>
+          <p:nvPr/>
+        </p:nvSpPr>
+        <p:spPr>
+          <a:xfrm>
+            <a:off x="9649587" y="3275806"/>
+            <a:ext cx="1864910" cy="507603"/>
+          </a:xfrm>
+          <a:prstGeom prst="rect">
+            <a:avLst/>
+          </a:prstGeom>
+          <a:noFill/>
+          <a:ln/>
+        </p:spPr>
+        <p:txBody>
+          <a:bodyPr wrap="square" lIns="0" tIns="0" rIns="0" bIns="0" rtlCol="0" anchor="t"/>
+          <a:lstStyle/>
+          <a:p>
+            <a:pPr algn="l" indent="0" marL="0">
+              <a:lnSpc>
+                <a:spcPts val="2000"/>
+              </a:lnSpc>
+              <a:buNone/>
+            </a:pPr>
+            <a:r>
+              <a:rPr lang="en-US" sz="1333" b="1" dirty="0">
+                <a:solidFill>
+                  <a:srgbClr val="FFFFFF"/>
+                </a:solidFill>
+                <a:latin typeface="Inter" pitchFamily="34" charset="0"/>
+                <a:ea typeface="Inter" pitchFamily="34" charset="-122"/>
+                <a:cs typeface="Inter" pitchFamily="34" charset="-120"/>
+              </a:rPr>
+              <a:t>THE EXIT IS UNTESTED</a:t>
+            </a:r>
+            <a:endParaRPr lang="en-US" sz="1333" dirty="0"/>
+          </a:p>
+        </p:txBody>
+      </p:sp>
+      <p:sp>
+        <p:nvSpPr>
+          <p:cNvPr id="17" name="Text 15"/>
+          <p:cNvSpPr/>
+          <p:nvPr/>
+        </p:nvSpPr>
+        <p:spPr>
+          <a:xfrm>
+            <a:off x="507873" y="4366419"/>
+            <a:ext cx="2708590" cy="1470422"/>
+          </a:xfrm>
+          <a:prstGeom prst="rect">
+            <a:avLst/>
+          </a:prstGeom>
+          <a:solidFill>
+            <a:srgbClr val="1F8A82"/>
+          </a:solidFill>
+          <a:ln/>
+        </p:spPr>
+        <p:txBody>
+          <a:bodyPr wrap="square" rtlCol="0" anchor="ctr"/>
+          <a:lstStyle/>
+          <a:p>
+            <a:pPr indent="0" marL="0">
+              <a:buNone/>
+            </a:pPr>
+            <a:endParaRPr lang="en-US" dirty="0"/>
+          </a:p>
+        </p:txBody>
+      </p:sp>
+      <p:sp>
+        <p:nvSpPr>
+          <p:cNvPr id="18" name="Text 16"/>
+          <p:cNvSpPr/>
+          <p:nvPr/>
+        </p:nvSpPr>
+        <p:spPr>
+          <a:xfrm>
+            <a:off x="744748" y="4590852"/>
+            <a:ext cx="2279536" cy="690761"/>
+          </a:xfrm>
+          <a:prstGeom prst="rect">
+            <a:avLst/>
+          </a:prstGeom>
+          <a:noFill/>
+          <a:ln/>
+        </p:spPr>
+        <p:txBody>
+          <a:bodyPr wrap="square" lIns="0" tIns="0" rIns="0" bIns="0" rtlCol="0" anchor="t"/>
+          <a:lstStyle/>
+          <a:p>
+            <a:pPr algn="l" indent="0" marL="0">
+              <a:lnSpc>
+                <a:spcPts val="5439"/>
+              </a:lnSpc>
+              <a:buNone/>
+            </a:pPr>
+            <a:r>
+              <a:rPr lang="en-US" sz="4533" b="1" dirty="0">
+                <a:solidFill>
+                  <a:srgbClr val="FFFFFF"/>
+                </a:solidFill>
+                <a:latin typeface="Archivo" pitchFamily="34" charset="0"/>
+                <a:ea typeface="Archivo" pitchFamily="34" charset="-122"/>
+                <a:cs typeface="Archivo" pitchFamily="34" charset="-120"/>
+              </a:rPr>
+              <a:t>03</a:t>
+            </a:r>
+            <a:endParaRPr lang="en-US" sz="4533" dirty="0"/>
+          </a:p>
+        </p:txBody>
+      </p:sp>
+      <p:sp>
+        <p:nvSpPr>
+          <p:cNvPr id="19" name="Text 17"/>
+          <p:cNvSpPr/>
+          <p:nvPr/>
+        </p:nvSpPr>
+        <p:spPr>
+          <a:xfrm>
+            <a:off x="744748" y="5315347"/>
+            <a:ext cx="2279536" cy="297061"/>
+          </a:xfrm>
+          <a:prstGeom prst="rect">
+            <a:avLst/>
+          </a:prstGeom>
+          <a:noFill/>
+          <a:ln/>
+        </p:spPr>
+        <p:txBody>
+          <a:bodyPr wrap="square" lIns="0" tIns="0" rIns="0" bIns="0" rtlCol="0" anchor="t"/>
+          <a:lstStyle/>
+          <a:p>
+            <a:pPr algn="l" indent="0" marL="0">
+              <a:lnSpc>
+                <a:spcPts val="2340"/>
+              </a:lnSpc>
+              <a:spcBef>
+                <a:spcPts val="267"/>
+              </a:spcBef>
+              <a:buNone/>
+            </a:pPr>
+            <a:r>
+              <a:rPr lang="en-US" sz="1733" b="1" dirty="0">
+                <a:solidFill>
+                  <a:srgbClr val="FFFFFF"/>
+                </a:solidFill>
+                <a:latin typeface="Inter" pitchFamily="34" charset="0"/>
+                <a:ea typeface="Inter" pitchFamily="34" charset="-122"/>
+                <a:cs typeface="Inter" pitchFamily="34" charset="-120"/>
+              </a:rPr>
+              <a:t>SESSIONS</a:t>
+            </a:r>
+            <a:endParaRPr lang="en-US" sz="1733" dirty="0"/>
+          </a:p>
+        </p:txBody>
+      </p:sp>
+      <p:sp>
+        <p:nvSpPr>
+          <p:cNvPr id="20" name="Text 18"/>
+          <p:cNvSpPr/>
+          <p:nvPr/>
+        </p:nvSpPr>
+        <p:spPr>
+          <a:xfrm>
+            <a:off x="3588837" y="4603552"/>
+            <a:ext cx="5594931" cy="995958"/>
+          </a:xfrm>
+          <a:prstGeom prst="rect">
+            <a:avLst/>
+          </a:prstGeom>
+          <a:noFill/>
+          <a:ln/>
+        </p:spPr>
+        <p:txBody>
+          <a:bodyPr wrap="square" lIns="0" tIns="0" rIns="0" bIns="0" rtlCol="0" anchor="t"/>
+          <a:lstStyle/>
+          <a:p>
+            <a:pPr algn="l" indent="0" marL="0">
+              <a:lnSpc>
+                <a:spcPts val="2613"/>
+              </a:lnSpc>
+              <a:buNone/>
+            </a:pPr>
+            <a:r>
+              <a:rPr lang="en-US" sz="1866" dirty="0">
+                <a:solidFill>
+                  <a:srgbClr val="2A2D34"/>
+                </a:solidFill>
+                <a:latin typeface="Inter" pitchFamily="34" charset="0"/>
+                <a:ea typeface="Inter" pitchFamily="34" charset="-122"/>
+                <a:cs typeface="Inter" pitchFamily="34" charset="-120"/>
+              </a:rPr>
+              <a:t>All three serve two versions at once, if only for a moment. State pinned to one instance dies with that instance.</a:t>
+            </a:r>
+            <a:endParaRPr lang="en-US" sz="1866" dirty="0"/>
+          </a:p>
+        </p:txBody>
+      </p:sp>
+      <p:sp>
+        <p:nvSpPr>
+          <p:cNvPr id="21" name="Text 19"/>
+          <p:cNvSpPr/>
+          <p:nvPr/>
+        </p:nvSpPr>
+        <p:spPr>
+          <a:xfrm>
+            <a:off x="9446438" y="4366419"/>
+            <a:ext cx="2234641" cy="1470422"/>
+          </a:xfrm>
+          <a:prstGeom prst="rect">
+            <a:avLst/>
+          </a:prstGeom>
+          <a:solidFill>
+            <a:srgbClr val="2A2D34"/>
+          </a:solidFill>
+          <a:ln/>
+        </p:spPr>
+        <p:txBody>
+          <a:bodyPr wrap="square" rtlCol="0" anchor="ctr"/>
+          <a:lstStyle/>
+          <a:p>
+            <a:pPr indent="0" marL="0">
+              <a:buNone/>
+            </a:pPr>
+            <a:endParaRPr lang="en-US" dirty="0"/>
+          </a:p>
+        </p:txBody>
+      </p:sp>
+      <p:sp>
+        <p:nvSpPr>
+          <p:cNvPr id="22" name="Text 20"/>
+          <p:cNvSpPr/>
+          <p:nvPr/>
+        </p:nvSpPr>
+        <p:spPr>
+          <a:xfrm>
+            <a:off x="9649587" y="4847828"/>
+            <a:ext cx="1864910" cy="507603"/>
+          </a:xfrm>
+          <a:prstGeom prst="rect">
+            <a:avLst/>
+          </a:prstGeom>
+          <a:noFill/>
+          <a:ln/>
+        </p:spPr>
+        <p:txBody>
+          <a:bodyPr wrap="square" lIns="0" tIns="0" rIns="0" bIns="0" rtlCol="0" anchor="t"/>
+          <a:lstStyle/>
+          <a:p>
+            <a:pPr algn="l" indent="0" marL="0">
+              <a:lnSpc>
+                <a:spcPts val="2000"/>
+              </a:lnSpc>
+              <a:buNone/>
+            </a:pPr>
+            <a:r>
+              <a:rPr lang="en-US" sz="1333" b="1" dirty="0">
+                <a:solidFill>
+                  <a:srgbClr val="FFFFFF"/>
+                </a:solidFill>
+                <a:latin typeface="Inter" pitchFamily="34" charset="0"/>
+                <a:ea typeface="Inter" pitchFamily="34" charset="-122"/>
+                <a:cs typeface="Inter" pitchFamily="34" charset="-120"/>
+              </a:rPr>
+              <a:t>USERS LOSE THEIR STATE</a:t>
+            </a:r>
+            <a:endParaRPr lang="en-US" sz="1333" dirty="0"/>
+          </a:p>
+        </p:txBody>
+      </p:sp>
+      <p:sp>
+        <p:nvSpPr>
+          <p:cNvPr id="23" name="Text 21"/>
+          <p:cNvSpPr/>
+          <p:nvPr/>
+        </p:nvSpPr>
+        <p:spPr>
+          <a:xfrm>
+            <a:off x="507873" y="6006306"/>
+            <a:ext cx="11396670" cy="343694"/>
+          </a:xfrm>
+          <a:prstGeom prst="rect">
+            <a:avLst/>
+          </a:prstGeom>
+          <a:noFill/>
+          <a:ln/>
+        </p:spPr>
+        <p:txBody>
+          <a:bodyPr wrap="square" lIns="0" tIns="0" rIns="0" bIns="0" rtlCol="0" anchor="t"/>
+          <a:lstStyle/>
+          <a:p>
+            <a:pPr algn="l" indent="0" marL="0">
+              <a:lnSpc>
+                <a:spcPts val="2706"/>
+              </a:lnSpc>
+              <a:buNone/>
+            </a:pPr>
+            <a:r>
+              <a:rPr lang="en-US" sz="1866" b="1" dirty="0">
+                <a:solidFill>
+                  <a:srgbClr val="2A2D34"/>
+                </a:solidFill>
+                <a:latin typeface="Inter" pitchFamily="34" charset="0"/>
+                <a:ea typeface="Inter" pitchFamily="34" charset="-122"/>
+                <a:cs typeface="Inter" pitchFamily="34" charset="-120"/>
+              </a:rPr>
+              <a:t>Missing one of these leaves you with the slowest exit you own.</a:t>
+            </a:r>
+            <a:endParaRPr lang="en-US" sz="1866" dirty="0"/>
+          </a:p>
+        </p:txBody>
+      </p:sp>
     </p:spTree>
   </p:cSld>
   <p:clrMapOvr>
@@ -1406,6 +4901,13 @@
 <file path=ppt/slides/slide5.xml><?xml version="1.0" encoding="utf-8"?>
 <p:sld xmlns:a="http://schemas.openxmlformats.org/drawingml/2006/main" xmlns:r="http://schemas.openxmlformats.org/officeDocument/2006/relationships" xmlns:p="http://schemas.openxmlformats.org/presentationml/2006/main">
   <p:cSld name="Slide 5">
+    <p:bg>
+      <p:bgPr>
+        <a:solidFill>
+          <a:srgbClr val="FFFFFF"/>
+        </a:solidFill>
+      </p:bgPr>
+    </p:bg>
     <p:spTree>
       <p:nvGrpSpPr>
         <p:cNvPr id="1" name=""/>
@@ -1420,30 +4922,648 @@
           <a:chExt cx="0" cy="0"/>
         </a:xfrm>
       </p:grpSpPr>
-      <p:pic>
-        <p:nvPicPr>
-          <p:cNvPr id="2" name="Image 0" descr="/tmp/slide-1787840595315-v6m56ngv0xt.png">    </p:cNvPr>
-          <p:cNvPicPr>
-            <a:picLocks noChangeAspect="1"/>
-          </p:cNvPicPr>
-          <p:nvPr/>
-        </p:nvPicPr>
-        <p:blipFill>
-          <a:blip r:embed="rId1"/>
-          <a:stretch>
-            <a:fillRect/>
-          </a:stretch>
-        </p:blipFill>
-        <p:spPr>
-          <a:xfrm>
-            <a:off x="0" y="0"/>
-            <a:ext cx="12188952" cy="6858000"/>
-          </a:xfrm>
-          <a:prstGeom prst="rect">
-            <a:avLst/>
-          </a:prstGeom>
-        </p:spPr>
-      </p:pic>
+      <p:sp>
+        <p:nvSpPr>
+          <p:cNvPr id="2" name="Text 0"/>
+          <p:cNvSpPr/>
+          <p:nvPr/>
+        </p:nvSpPr>
+        <p:spPr>
+          <a:xfrm>
+            <a:off x="406298" y="406400"/>
+            <a:ext cx="11376355" cy="2325688"/>
+          </a:xfrm>
+          <a:prstGeom prst="rect">
+            <a:avLst/>
+          </a:prstGeom>
+          <a:solidFill>
+            <a:srgbClr val="2A2D34"/>
+          </a:solidFill>
+          <a:ln/>
+        </p:spPr>
+        <p:txBody>
+          <a:bodyPr wrap="square" rtlCol="0" anchor="ctr"/>
+          <a:lstStyle/>
+          <a:p>
+            <a:pPr indent="0" marL="0">
+              <a:buNone/>
+            </a:pPr>
+            <a:endParaRPr lang="en-US" dirty="0"/>
+          </a:p>
+        </p:txBody>
+      </p:sp>
+      <p:sp>
+        <p:nvSpPr>
+          <p:cNvPr id="3" name="Text 1"/>
+          <p:cNvSpPr/>
+          <p:nvPr/>
+        </p:nvSpPr>
+        <p:spPr>
+          <a:xfrm>
+            <a:off x="406298" y="406400"/>
+            <a:ext cx="169225" cy="2325688"/>
+          </a:xfrm>
+          <a:prstGeom prst="rect">
+            <a:avLst/>
+          </a:prstGeom>
+          <a:solidFill>
+            <a:srgbClr val="E8A317"/>
+          </a:solidFill>
+          <a:ln/>
+        </p:spPr>
+        <p:txBody>
+          <a:bodyPr wrap="square" rtlCol="0" anchor="ctr"/>
+          <a:lstStyle/>
+          <a:p>
+            <a:pPr indent="0" marL="0">
+              <a:buNone/>
+            </a:pPr>
+            <a:endParaRPr lang="en-US" dirty="0"/>
+          </a:p>
+        </p:txBody>
+      </p:sp>
+      <p:sp>
+        <p:nvSpPr>
+          <p:cNvPr id="4" name="Text 2"/>
+          <p:cNvSpPr/>
+          <p:nvPr/>
+        </p:nvSpPr>
+        <p:spPr>
+          <a:xfrm>
+            <a:off x="1015548" y="846534"/>
+            <a:ext cx="10533623" cy="1005284"/>
+          </a:xfrm>
+          <a:prstGeom prst="rect">
+            <a:avLst/>
+          </a:prstGeom>
+          <a:noFill/>
+          <a:ln/>
+        </p:spPr>
+        <p:txBody>
+          <a:bodyPr wrap="square" lIns="0" tIns="0" rIns="0" bIns="0" rtlCol="0" anchor="t"/>
+          <a:lstStyle/>
+          <a:p>
+            <a:pPr algn="l" indent="0" marL="0">
+              <a:lnSpc>
+                <a:spcPts val="3960"/>
+              </a:lnSpc>
+              <a:buNone/>
+            </a:pPr>
+            <a:r>
+              <a:rPr lang="en-US" sz="2933" b="1" dirty="0">
+                <a:solidFill>
+                  <a:srgbClr val="FFFFFF"/>
+                </a:solidFill>
+                <a:latin typeface="Archivo" pitchFamily="34" charset="0"/>
+                <a:ea typeface="Archivo" pitchFamily="34" charset="-122"/>
+                <a:cs typeface="Archivo" pitchFamily="34" charset="-120"/>
+              </a:rPr>
+              <a:t>Two answers pick the strategy: how long a bad release may keep serving, and whether traffic can be split.</a:t>
+            </a:r>
+            <a:endParaRPr lang="en-US" sz="2933" dirty="0"/>
+          </a:p>
+        </p:txBody>
+      </p:sp>
+      <p:sp>
+        <p:nvSpPr>
+          <p:cNvPr id="5" name="Text 3"/>
+          <p:cNvSpPr/>
+          <p:nvPr/>
+        </p:nvSpPr>
+        <p:spPr>
+          <a:xfrm>
+            <a:off x="809006" y="2055019"/>
+            <a:ext cx="10533623" cy="236934"/>
+          </a:xfrm>
+          <a:prstGeom prst="rect">
+            <a:avLst/>
+          </a:prstGeom>
+          <a:noFill/>
+          <a:ln/>
+        </p:spPr>
+        <p:txBody>
+          <a:bodyPr wrap="square" lIns="0" tIns="0" rIns="0" bIns="0" rtlCol="0" anchor="t"/>
+          <a:lstStyle/>
+          <a:p>
+            <a:pPr algn="r" indent="0" marL="0">
+              <a:lnSpc>
+                <a:spcPts val="1866"/>
+              </a:lnSpc>
+              <a:spcBef>
+                <a:spcPts val="1600"/>
+              </a:spcBef>
+              <a:buNone/>
+            </a:pPr>
+            <a:r>
+              <a:rPr lang="en-US" sz="1333" b="1" dirty="0">
+                <a:solidFill>
+                  <a:srgbClr val="FFFFFF"/>
+                </a:solidFill>
+                <a:latin typeface="Inter" pitchFamily="34" charset="0"/>
+                <a:ea typeface="Inter" pitchFamily="34" charset="-122"/>
+                <a:cs typeface="Inter" pitchFamily="34" charset="-120"/>
+              </a:rPr>
+              <a:t>PRESENTER · TEAM</a:t>
+            </a:r>
+            <a:endParaRPr lang="en-US" sz="1333" dirty="0"/>
+          </a:p>
+        </p:txBody>
+      </p:sp>
+      <p:sp>
+        <p:nvSpPr>
+          <p:cNvPr id="6" name="Text 4"/>
+          <p:cNvSpPr/>
+          <p:nvPr/>
+        </p:nvSpPr>
+        <p:spPr>
+          <a:xfrm>
+            <a:off x="406298" y="2833687"/>
+            <a:ext cx="3724336" cy="3617912"/>
+          </a:xfrm>
+          <a:prstGeom prst="rect">
+            <a:avLst/>
+          </a:prstGeom>
+          <a:solidFill>
+            <a:srgbClr val="2A2D34"/>
+          </a:solidFill>
+          <a:ln/>
+        </p:spPr>
+        <p:txBody>
+          <a:bodyPr wrap="square" rtlCol="0" anchor="ctr"/>
+          <a:lstStyle/>
+          <a:p>
+            <a:pPr indent="0" marL="0">
+              <a:buNone/>
+            </a:pPr>
+            <a:endParaRPr lang="en-US" dirty="0"/>
+          </a:p>
+        </p:txBody>
+      </p:sp>
+      <p:sp>
+        <p:nvSpPr>
+          <p:cNvPr id="7" name="Text 5"/>
+          <p:cNvSpPr/>
+          <p:nvPr/>
+        </p:nvSpPr>
+        <p:spPr>
+          <a:xfrm>
+            <a:off x="778672" y="3620691"/>
+            <a:ext cx="3039179" cy="650280"/>
+          </a:xfrm>
+          <a:prstGeom prst="rect">
+            <a:avLst/>
+          </a:prstGeom>
+          <a:noFill/>
+          <a:ln/>
+        </p:spPr>
+        <p:txBody>
+          <a:bodyPr wrap="square" lIns="0" tIns="0" rIns="0" bIns="0" rtlCol="0" anchor="t"/>
+          <a:lstStyle/>
+          <a:p>
+            <a:pPr algn="l" indent="0" marL="0">
+              <a:lnSpc>
+                <a:spcPts val="5119"/>
+              </a:lnSpc>
+              <a:spcBef>
+                <a:spcPts val="1333"/>
+              </a:spcBef>
+              <a:buNone/>
+            </a:pPr>
+            <a:r>
+              <a:rPr lang="en-US" sz="4266" b="1" dirty="0">
+                <a:solidFill>
+                  <a:srgbClr val="FFFFFF"/>
+                </a:solidFill>
+                <a:latin typeface="Archivo" pitchFamily="34" charset="0"/>
+                <a:ea typeface="Archivo" pitchFamily="34" charset="-122"/>
+                <a:cs typeface="Archivo" pitchFamily="34" charset="-120"/>
+              </a:rPr>
+              <a:t>01</a:t>
+            </a:r>
+            <a:endParaRPr lang="en-US" sz="4266" dirty="0"/>
+          </a:p>
+        </p:txBody>
+      </p:sp>
+      <p:sp>
+        <p:nvSpPr>
+          <p:cNvPr id="8" name="Text 6"/>
+          <p:cNvSpPr/>
+          <p:nvPr/>
+        </p:nvSpPr>
+        <p:spPr>
+          <a:xfrm>
+            <a:off x="778672" y="4372570"/>
+            <a:ext cx="3039179" cy="260747"/>
+          </a:xfrm>
+          <a:prstGeom prst="rect">
+            <a:avLst/>
+          </a:prstGeom>
+          <a:noFill/>
+          <a:ln/>
+        </p:spPr>
+        <p:txBody>
+          <a:bodyPr wrap="square" lIns="0" tIns="0" rIns="0" bIns="0" rtlCol="0" anchor="t"/>
+          <a:lstStyle/>
+          <a:p>
+            <a:pPr algn="l" indent="0" marL="0">
+              <a:lnSpc>
+                <a:spcPts val="2053"/>
+              </a:lnSpc>
+              <a:spcBef>
+                <a:spcPts val="800"/>
+              </a:spcBef>
+              <a:buNone/>
+            </a:pPr>
+            <a:r>
+              <a:rPr lang="en-US" sz="1466" b="1" dirty="0">
+                <a:solidFill>
+                  <a:srgbClr val="FFFFFF"/>
+                </a:solidFill>
+                <a:latin typeface="Inter" pitchFamily="34" charset="0"/>
+                <a:ea typeface="Inter" pitchFamily="34" charset="-122"/>
+                <a:cs typeface="Inter" pitchFamily="34" charset="-120"/>
+              </a:rPr>
+              <a:t>THE EXIT BUDGET</a:t>
+            </a:r>
+            <a:endParaRPr lang="en-US" sz="1466" dirty="0"/>
+          </a:p>
+        </p:txBody>
+      </p:sp>
+      <p:sp>
+        <p:nvSpPr>
+          <p:cNvPr id="9" name="Text 7"/>
+          <p:cNvSpPr/>
+          <p:nvPr/>
+        </p:nvSpPr>
+        <p:spPr>
+          <a:xfrm>
+            <a:off x="778672" y="4802584"/>
+            <a:ext cx="3039179" cy="1031081"/>
+          </a:xfrm>
+          <a:prstGeom prst="rect">
+            <a:avLst/>
+          </a:prstGeom>
+          <a:noFill/>
+          <a:ln/>
+        </p:spPr>
+        <p:txBody>
+          <a:bodyPr wrap="square" lIns="0" tIns="0" rIns="0" bIns="0" rtlCol="0" anchor="t"/>
+          <a:lstStyle/>
+          <a:p>
+            <a:pPr algn="l" indent="0" marL="0">
+              <a:lnSpc>
+                <a:spcPts val="2706"/>
+              </a:lnSpc>
+              <a:spcBef>
+                <a:spcPts val="1333"/>
+              </a:spcBef>
+              <a:buNone/>
+            </a:pPr>
+            <a:r>
+              <a:rPr lang="en-US" sz="1866" dirty="0">
+                <a:solidFill>
+                  <a:srgbClr val="FFFFFF"/>
+                </a:solidFill>
+                <a:latin typeface="Inter" pitchFamily="34" charset="0"/>
+                <a:ea typeface="Inter" pitchFamily="34" charset="-122"/>
+                <a:cs typeface="Inter" pitchFamily="34" charset="-120"/>
+              </a:rPr>
+              <a:t>How long may a bad release serve before we call it an incident?</a:t>
+            </a:r>
+            <a:endParaRPr lang="en-US" sz="1866" dirty="0"/>
+          </a:p>
+        </p:txBody>
+      </p:sp>
+      <p:sp>
+        <p:nvSpPr>
+          <p:cNvPr id="10" name="Text 8"/>
+          <p:cNvSpPr/>
+          <p:nvPr/>
+        </p:nvSpPr>
+        <p:spPr>
+          <a:xfrm>
+            <a:off x="4232209" y="2833687"/>
+            <a:ext cx="3724336" cy="3617912"/>
+          </a:xfrm>
+          <a:prstGeom prst="rect">
+            <a:avLst/>
+          </a:prstGeom>
+          <a:solidFill>
+            <a:srgbClr val="1F8A82"/>
+          </a:solidFill>
+          <a:ln/>
+        </p:spPr>
+        <p:txBody>
+          <a:bodyPr wrap="square" rtlCol="0" anchor="ctr"/>
+          <a:lstStyle/>
+          <a:p>
+            <a:pPr indent="0" marL="0">
+              <a:buNone/>
+            </a:pPr>
+            <a:endParaRPr lang="en-US" dirty="0"/>
+          </a:p>
+        </p:txBody>
+      </p:sp>
+      <p:sp>
+        <p:nvSpPr>
+          <p:cNvPr id="11" name="Text 9"/>
+          <p:cNvSpPr/>
+          <p:nvPr/>
+        </p:nvSpPr>
+        <p:spPr>
+          <a:xfrm>
+            <a:off x="4604583" y="3620691"/>
+            <a:ext cx="3039179" cy="650280"/>
+          </a:xfrm>
+          <a:prstGeom prst="rect">
+            <a:avLst/>
+          </a:prstGeom>
+          <a:noFill/>
+          <a:ln/>
+        </p:spPr>
+        <p:txBody>
+          <a:bodyPr wrap="square" lIns="0" tIns="0" rIns="0" bIns="0" rtlCol="0" anchor="t"/>
+          <a:lstStyle/>
+          <a:p>
+            <a:pPr algn="l" indent="0" marL="0">
+              <a:lnSpc>
+                <a:spcPts val="5119"/>
+              </a:lnSpc>
+              <a:spcBef>
+                <a:spcPts val="1333"/>
+              </a:spcBef>
+              <a:buNone/>
+            </a:pPr>
+            <a:r>
+              <a:rPr lang="en-US" sz="4266" b="1" dirty="0">
+                <a:solidFill>
+                  <a:srgbClr val="FFFFFF"/>
+                </a:solidFill>
+                <a:latin typeface="Archivo" pitchFamily="34" charset="0"/>
+                <a:ea typeface="Archivo" pitchFamily="34" charset="-122"/>
+                <a:cs typeface="Archivo" pitchFamily="34" charset="-120"/>
+              </a:rPr>
+              <a:t>02</a:t>
+            </a:r>
+            <a:endParaRPr lang="en-US" sz="4266" dirty="0"/>
+          </a:p>
+        </p:txBody>
+      </p:sp>
+      <p:sp>
+        <p:nvSpPr>
+          <p:cNvPr id="12" name="Text 10"/>
+          <p:cNvSpPr/>
+          <p:nvPr/>
+        </p:nvSpPr>
+        <p:spPr>
+          <a:xfrm>
+            <a:off x="4604583" y="4372570"/>
+            <a:ext cx="3039179" cy="260747"/>
+          </a:xfrm>
+          <a:prstGeom prst="rect">
+            <a:avLst/>
+          </a:prstGeom>
+          <a:noFill/>
+          <a:ln/>
+        </p:spPr>
+        <p:txBody>
+          <a:bodyPr wrap="square" lIns="0" tIns="0" rIns="0" bIns="0" rtlCol="0" anchor="t"/>
+          <a:lstStyle/>
+          <a:p>
+            <a:pPr algn="l" indent="0" marL="0">
+              <a:lnSpc>
+                <a:spcPts val="2053"/>
+              </a:lnSpc>
+              <a:spcBef>
+                <a:spcPts val="800"/>
+              </a:spcBef>
+              <a:buNone/>
+            </a:pPr>
+            <a:r>
+              <a:rPr lang="en-US" sz="1466" b="1" dirty="0">
+                <a:solidFill>
+                  <a:srgbClr val="FFFFFF"/>
+                </a:solidFill>
+                <a:latin typeface="Inter" pitchFamily="34" charset="0"/>
+                <a:ea typeface="Inter" pitchFamily="34" charset="-122"/>
+                <a:cs typeface="Inter" pitchFamily="34" charset="-120"/>
+              </a:rPr>
+              <a:t>THE ROUTER</a:t>
+            </a:r>
+            <a:endParaRPr lang="en-US" sz="1466" dirty="0"/>
+          </a:p>
+        </p:txBody>
+      </p:sp>
+      <p:sp>
+        <p:nvSpPr>
+          <p:cNvPr id="13" name="Text 11"/>
+          <p:cNvSpPr/>
+          <p:nvPr/>
+        </p:nvSpPr>
+        <p:spPr>
+          <a:xfrm>
+            <a:off x="4604583" y="4802584"/>
+            <a:ext cx="3039179" cy="1031081"/>
+          </a:xfrm>
+          <a:prstGeom prst="rect">
+            <a:avLst/>
+          </a:prstGeom>
+          <a:noFill/>
+          <a:ln/>
+        </p:spPr>
+        <p:txBody>
+          <a:bodyPr wrap="square" lIns="0" tIns="0" rIns="0" bIns="0" rtlCol="0" anchor="t"/>
+          <a:lstStyle/>
+          <a:p>
+            <a:pPr algn="l" indent="0" marL="0">
+              <a:lnSpc>
+                <a:spcPts val="2706"/>
+              </a:lnSpc>
+              <a:spcBef>
+                <a:spcPts val="1333"/>
+              </a:spcBef>
+              <a:buNone/>
+            </a:pPr>
+            <a:r>
+              <a:rPr lang="en-US" sz="1866" dirty="0">
+                <a:solidFill>
+                  <a:srgbClr val="FFFFFF"/>
+                </a:solidFill>
+                <a:latin typeface="Inter" pitchFamily="34" charset="0"/>
+                <a:ea typeface="Inter" pitchFamily="34" charset="-122"/>
+                <a:cs typeface="Inter" pitchFamily="34" charset="-120"/>
+              </a:rPr>
+              <a:t>Can our ingress split traffic by request today? If not, what would it take?</a:t>
+            </a:r>
+            <a:endParaRPr lang="en-US" sz="1866" dirty="0"/>
+          </a:p>
+        </p:txBody>
+      </p:sp>
+      <p:sp>
+        <p:nvSpPr>
+          <p:cNvPr id="14" name="Text 12"/>
+          <p:cNvSpPr/>
+          <p:nvPr/>
+        </p:nvSpPr>
+        <p:spPr>
+          <a:xfrm>
+            <a:off x="8058119" y="2833687"/>
+            <a:ext cx="3724336" cy="3617912"/>
+          </a:xfrm>
+          <a:prstGeom prst="rect">
+            <a:avLst/>
+          </a:prstGeom>
+          <a:solidFill>
+            <a:srgbClr val="2A2D34"/>
+          </a:solidFill>
+          <a:ln/>
+        </p:spPr>
+        <p:txBody>
+          <a:bodyPr wrap="square" rtlCol="0" anchor="ctr"/>
+          <a:lstStyle/>
+          <a:p>
+            <a:pPr indent="0" marL="0">
+              <a:buNone/>
+            </a:pPr>
+            <a:endParaRPr lang="en-US" dirty="0"/>
+          </a:p>
+        </p:txBody>
+      </p:sp>
+      <p:sp>
+        <p:nvSpPr>
+          <p:cNvPr id="15" name="Text 13"/>
+          <p:cNvSpPr/>
+          <p:nvPr/>
+        </p:nvSpPr>
+        <p:spPr>
+          <a:xfrm>
+            <a:off x="8430493" y="3620691"/>
+            <a:ext cx="3039179" cy="650280"/>
+          </a:xfrm>
+          <a:prstGeom prst="rect">
+            <a:avLst/>
+          </a:prstGeom>
+          <a:noFill/>
+          <a:ln/>
+        </p:spPr>
+        <p:txBody>
+          <a:bodyPr wrap="square" lIns="0" tIns="0" rIns="0" bIns="0" rtlCol="0" anchor="t"/>
+          <a:lstStyle/>
+          <a:p>
+            <a:pPr algn="l" indent="0" marL="0">
+              <a:lnSpc>
+                <a:spcPts val="5119"/>
+              </a:lnSpc>
+              <a:spcBef>
+                <a:spcPts val="1333"/>
+              </a:spcBef>
+              <a:buNone/>
+            </a:pPr>
+            <a:r>
+              <a:rPr lang="en-US" sz="4266" b="1" dirty="0">
+                <a:solidFill>
+                  <a:srgbClr val="FFFFFF"/>
+                </a:solidFill>
+                <a:latin typeface="Archivo" pitchFamily="34" charset="0"/>
+                <a:ea typeface="Archivo" pitchFamily="34" charset="-122"/>
+                <a:cs typeface="Archivo" pitchFamily="34" charset="-120"/>
+              </a:rPr>
+              <a:t>03</a:t>
+            </a:r>
+            <a:endParaRPr lang="en-US" sz="4266" dirty="0"/>
+          </a:p>
+        </p:txBody>
+      </p:sp>
+      <p:sp>
+        <p:nvSpPr>
+          <p:cNvPr id="16" name="Text 14"/>
+          <p:cNvSpPr/>
+          <p:nvPr/>
+        </p:nvSpPr>
+        <p:spPr>
+          <a:xfrm>
+            <a:off x="8430493" y="4372570"/>
+            <a:ext cx="3039179" cy="260747"/>
+          </a:xfrm>
+          <a:prstGeom prst="rect">
+            <a:avLst/>
+          </a:prstGeom>
+          <a:noFill/>
+          <a:ln/>
+        </p:spPr>
+        <p:txBody>
+          <a:bodyPr wrap="square" lIns="0" tIns="0" rIns="0" bIns="0" rtlCol="0" anchor="t"/>
+          <a:lstStyle/>
+          <a:p>
+            <a:pPr algn="l" indent="0" marL="0">
+              <a:lnSpc>
+                <a:spcPts val="2053"/>
+              </a:lnSpc>
+              <a:spcBef>
+                <a:spcPts val="800"/>
+              </a:spcBef>
+              <a:buNone/>
+            </a:pPr>
+            <a:r>
+              <a:rPr lang="en-US" sz="1466" b="1" dirty="0">
+                <a:solidFill>
+                  <a:srgbClr val="FFFFFF"/>
+                </a:solidFill>
+                <a:latin typeface="Inter" pitchFamily="34" charset="0"/>
+                <a:ea typeface="Inter" pitchFamily="34" charset="-122"/>
+                <a:cs typeface="Inter" pitchFamily="34" charset="-120"/>
+              </a:rPr>
+              <a:t>THE DRILL</a:t>
+            </a:r>
+            <a:endParaRPr lang="en-US" sz="1466" dirty="0"/>
+          </a:p>
+        </p:txBody>
+      </p:sp>
+      <p:sp>
+        <p:nvSpPr>
+          <p:cNvPr id="17" name="Text 15"/>
+          <p:cNvSpPr/>
+          <p:nvPr/>
+        </p:nvSpPr>
+        <p:spPr>
+          <a:xfrm>
+            <a:off x="8430493" y="4802584"/>
+            <a:ext cx="3039179" cy="1031081"/>
+          </a:xfrm>
+          <a:prstGeom prst="rect">
+            <a:avLst/>
+          </a:prstGeom>
+          <a:noFill/>
+          <a:ln/>
+        </p:spPr>
+        <p:txBody>
+          <a:bodyPr wrap="square" lIns="0" tIns="0" rIns="0" bIns="0" rtlCol="0" anchor="t"/>
+          <a:lstStyle/>
+          <a:p>
+            <a:pPr algn="l" indent="0" marL="0">
+              <a:lnSpc>
+                <a:spcPts val="2706"/>
+              </a:lnSpc>
+              <a:spcBef>
+                <a:spcPts val="1333"/>
+              </a:spcBef>
+              <a:buNone/>
+            </a:pPr>
+            <a:r>
+              <a:rPr lang="en-US" sz="1866" dirty="0">
+                <a:solidFill>
+                  <a:srgbClr val="FFFFFF"/>
+                </a:solidFill>
+                <a:latin typeface="Inter" pitchFamily="34" charset="0"/>
+                <a:ea typeface="Inter" pitchFamily="34" charset="-122"/>
+                <a:cs typeface="Inter" pitchFamily="34" charset="-120"/>
+              </a:rPr>
+              <a:t>When did we last roll back on purpose, and what did it cost us to find out?</a:t>
+            </a:r>
+            <a:endParaRPr lang="en-US" sz="1866" dirty="0"/>
+          </a:p>
+        </p:txBody>
+      </p:sp>
     </p:spTree>
   </p:cSld>
   <p:clrMapOvr>

--- a/decks/deployment-strategies/deployment-strategies.pptx
+++ b/decks/deployment-strategies/deployment-strategies.pptx
@@ -1279,7 +1279,7 @@
           <a:ln/>
         </p:spPr>
         <p:txBody>
-          <a:bodyPr wrap="square" lIns="0" tIns="0" rIns="0" bIns="0" rtlCol="0" anchor="t"/>
+          <a:bodyPr wrap="none" lIns="0" tIns="0" rIns="0" bIns="0" rtlCol="0" anchor="t"/>
           <a:lstStyle/>
           <a:p>
             <a:pPr algn="l" indent="0" marL="0">
@@ -1321,7 +1321,9 @@
           <a:ln/>
         </p:spPr>
         <p:txBody>
-          <a:bodyPr wrap="square" lIns="0" tIns="0" rIns="0" bIns="0" rtlCol="0" anchor="t"/>
+          <a:bodyPr wrap="square" lIns="0" tIns="0" rIns="0" bIns="0" rtlCol="0" anchor="t">
+            <a:normAutofit/>
+          </a:bodyPr>
           <a:lstStyle/>
           <a:p>
             <a:pPr algn="l" indent="0" marL="0">
@@ -1389,7 +1391,7 @@
           <a:ln/>
         </p:spPr>
         <p:txBody>
-          <a:bodyPr wrap="square" lIns="0" tIns="0" rIns="0" bIns="0" rtlCol="0" anchor="t"/>
+          <a:bodyPr wrap="none" lIns="0" tIns="0" rIns="0" bIns="0" rtlCol="0" anchor="t"/>
           <a:lstStyle/>
           <a:p>
             <a:pPr algn="l" indent="0" marL="0">
@@ -1434,7 +1436,7 @@
           <a:ln/>
         </p:spPr>
         <p:txBody>
-          <a:bodyPr wrap="square" lIns="0" tIns="0" rIns="0" bIns="0" rtlCol="0" anchor="t"/>
+          <a:bodyPr wrap="none" lIns="0" tIns="0" rIns="0" bIns="0" rtlCol="0" anchor="t"/>
           <a:lstStyle/>
           <a:p>
             <a:pPr algn="l" indent="0" marL="0">
@@ -1509,7 +1511,9 @@
           <a:ln/>
         </p:spPr>
         <p:txBody>
-          <a:bodyPr wrap="square" lIns="0" tIns="0" rIns="0" bIns="0" rtlCol="0" anchor="t"/>
+          <a:bodyPr wrap="square" lIns="0" tIns="0" rIns="0" bIns="0" rtlCol="0" anchor="t">
+            <a:normAutofit/>
+          </a:bodyPr>
           <a:lstStyle/>
           <a:p>
             <a:pPr algn="l" indent="0" marL="0">
@@ -1581,7 +1585,7 @@
           <a:ln/>
         </p:spPr>
         <p:txBody>
-          <a:bodyPr wrap="square" lIns="0" tIns="0" rIns="0" bIns="0" rtlCol="0" anchor="t"/>
+          <a:bodyPr wrap="none" lIns="0" tIns="0" rIns="0" bIns="0" rtlCol="0" anchor="t"/>
           <a:lstStyle/>
           <a:p>
             <a:pPr algn="l" indent="0" marL="0">
@@ -1623,7 +1627,7 @@
           <a:ln/>
         </p:spPr>
         <p:txBody>
-          <a:bodyPr wrap="square" lIns="0" tIns="0" rIns="0" bIns="0" rtlCol="0" anchor="t"/>
+          <a:bodyPr wrap="none" lIns="0" tIns="0" rIns="0" bIns="0" rtlCol="0" anchor="t"/>
           <a:lstStyle/>
           <a:p>
             <a:pPr algn="l" indent="0" marL="0">
@@ -1698,7 +1702,7 @@
           <a:ln/>
         </p:spPr>
         <p:txBody>
-          <a:bodyPr wrap="square" lIns="0" tIns="0" rIns="0" bIns="0" rtlCol="0" anchor="t"/>
+          <a:bodyPr wrap="none" lIns="0" tIns="0" rIns="0" bIns="0" rtlCol="0" anchor="t"/>
           <a:lstStyle/>
           <a:p>
             <a:pPr algn="l" indent="0" marL="0">
@@ -1740,7 +1744,7 @@
           <a:ln/>
         </p:spPr>
         <p:txBody>
-          <a:bodyPr wrap="square" lIns="0" tIns="0" rIns="0" bIns="0" rtlCol="0" anchor="t"/>
+          <a:bodyPr wrap="none" lIns="0" tIns="0" rIns="0" bIns="0" rtlCol="0" anchor="t"/>
           <a:lstStyle/>
           <a:p>
             <a:pPr algn="l" indent="0" marL="0">
@@ -1815,7 +1819,7 @@
           <a:ln/>
         </p:spPr>
         <p:txBody>
-          <a:bodyPr wrap="square" lIns="0" tIns="0" rIns="0" bIns="0" rtlCol="0" anchor="t"/>
+          <a:bodyPr wrap="none" lIns="0" tIns="0" rIns="0" bIns="0" rtlCol="0" anchor="t"/>
           <a:lstStyle/>
           <a:p>
             <a:pPr algn="l" indent="0" marL="0">
@@ -1857,7 +1861,7 @@
           <a:ln/>
         </p:spPr>
         <p:txBody>
-          <a:bodyPr wrap="square" lIns="0" tIns="0" rIns="0" bIns="0" rtlCol="0" anchor="t"/>
+          <a:bodyPr wrap="none" lIns="0" tIns="0" rIns="0" bIns="0" rtlCol="0" anchor="t"/>
           <a:lstStyle/>
           <a:p>
             <a:pPr algn="l" indent="0" marL="0">
@@ -1934,7 +1938,7 @@
           <a:ln/>
         </p:spPr>
         <p:txBody>
-          <a:bodyPr wrap="square" lIns="0" tIns="0" rIns="0" bIns="0" rtlCol="0" anchor="t"/>
+          <a:bodyPr wrap="none" lIns="0" tIns="0" rIns="0" bIns="0" rtlCol="0" anchor="t"/>
           <a:lstStyle/>
           <a:p>
             <a:pPr algn="l" indent="0" marL="0">
@@ -2006,7 +2010,7 @@
           <a:ln/>
         </p:spPr>
         <p:txBody>
-          <a:bodyPr wrap="square" lIns="0" tIns="0" rIns="0" bIns="0" rtlCol="0" anchor="t"/>
+          <a:bodyPr wrap="none" lIns="0" tIns="0" rIns="0" bIns="0" rtlCol="0" anchor="t"/>
           <a:lstStyle/>
           <a:p>
             <a:pPr algn="l" indent="0" marL="0">
@@ -2048,7 +2052,9 @@
           <a:ln/>
         </p:spPr>
         <p:txBody>
-          <a:bodyPr wrap="square" lIns="0" tIns="0" rIns="0" bIns="0" rtlCol="0" anchor="t"/>
+          <a:bodyPr wrap="square" lIns="0" tIns="0" rIns="0" bIns="0" rtlCol="0" anchor="t">
+            <a:normAutofit/>
+          </a:bodyPr>
           <a:lstStyle/>
           <a:p>
             <a:pPr algn="l" indent="0" marL="0">
@@ -2120,7 +2126,9 @@
           <a:ln/>
         </p:spPr>
         <p:txBody>
-          <a:bodyPr wrap="square" lIns="0" tIns="0" rIns="0" bIns="0" rtlCol="0" anchor="t"/>
+          <a:bodyPr wrap="square" lIns="0" tIns="0" rIns="0" bIns="0" rtlCol="0" anchor="t">
+            <a:normAutofit/>
+          </a:bodyPr>
           <a:lstStyle/>
           <a:p>
             <a:pPr algn="l" indent="0" marL="0">
@@ -2162,7 +2170,9 @@
           <a:ln/>
         </p:spPr>
         <p:txBody>
-          <a:bodyPr wrap="square" lIns="0" tIns="0" rIns="0" bIns="0" rtlCol="0" anchor="t"/>
+          <a:bodyPr wrap="square" lIns="0" tIns="0" rIns="0" bIns="0" rtlCol="0" anchor="t">
+            <a:normAutofit/>
+          </a:bodyPr>
           <a:lstStyle/>
           <a:p>
             <a:pPr algn="l" indent="0" marL="0">
@@ -2234,7 +2244,7 @@
           <a:ln/>
         </p:spPr>
         <p:txBody>
-          <a:bodyPr wrap="square" lIns="0" tIns="0" rIns="0" bIns="0" rtlCol="0" anchor="t"/>
+          <a:bodyPr wrap="none" lIns="0" tIns="0" rIns="0" bIns="0" rtlCol="0" anchor="t"/>
           <a:lstStyle/>
           <a:p>
             <a:pPr algn="l" indent="0" marL="0">
@@ -2276,7 +2286,7 @@
           <a:ln/>
         </p:spPr>
         <p:txBody>
-          <a:bodyPr wrap="square" lIns="0" tIns="0" rIns="0" bIns="0" rtlCol="0" anchor="t"/>
+          <a:bodyPr wrap="none" lIns="0" tIns="0" rIns="0" bIns="0" rtlCol="0" anchor="t"/>
           <a:lstStyle/>
           <a:p>
             <a:pPr algn="l" indent="0" marL="0">
@@ -2322,6 +2332,10 @@
             <a:prstDash val="solid"/>
           </a:ln>
         </p:spPr>
+        <p:txBody>
+          <a:bodyPr/>
+          <a:p/>
+        </p:txBody>
       </p:sp>
       <p:sp>
         <p:nvSpPr>
@@ -2341,7 +2355,9 @@
           <a:ln/>
         </p:spPr>
         <p:txBody>
-          <a:bodyPr wrap="square" lIns="0" tIns="0" rIns="0" bIns="0" rtlCol="0" anchor="t"/>
+          <a:bodyPr wrap="square" lIns="0" tIns="0" rIns="0" bIns="0" rtlCol="0" anchor="t">
+            <a:normAutofit/>
+          </a:bodyPr>
           <a:lstStyle/>
           <a:p>
             <a:pPr algn="l" indent="0" marL="0">
@@ -2387,6 +2403,10 @@
             <a:prstDash val="solid"/>
           </a:ln>
         </p:spPr>
+        <p:txBody>
+          <a:bodyPr/>
+          <a:p/>
+        </p:txBody>
       </p:sp>
       <p:sp>
         <p:nvSpPr>
@@ -2406,7 +2426,9 @@
           <a:ln/>
         </p:spPr>
         <p:txBody>
-          <a:bodyPr wrap="square" lIns="0" tIns="0" rIns="0" bIns="0" rtlCol="0" anchor="t"/>
+          <a:bodyPr wrap="square" lIns="0" tIns="0" rIns="0" bIns="0" rtlCol="0" anchor="t">
+            <a:normAutofit/>
+          </a:bodyPr>
           <a:lstStyle/>
           <a:p>
             <a:pPr algn="l" indent="0" marL="0">
@@ -2452,6 +2474,10 @@
             <a:prstDash val="solid"/>
           </a:ln>
         </p:spPr>
+        <p:txBody>
+          <a:bodyPr/>
+          <a:p/>
+        </p:txBody>
       </p:sp>
       <p:sp>
         <p:nvSpPr>
@@ -2471,7 +2497,9 @@
           <a:ln/>
         </p:spPr>
         <p:txBody>
-          <a:bodyPr wrap="square" lIns="0" tIns="0" rIns="0" bIns="0" rtlCol="0" anchor="t"/>
+          <a:bodyPr wrap="square" lIns="0" tIns="0" rIns="0" bIns="0" rtlCol="0" anchor="t">
+            <a:normAutofit/>
+          </a:bodyPr>
           <a:lstStyle/>
           <a:p>
             <a:pPr algn="l" indent="0" marL="0">
@@ -2543,7 +2571,7 @@
           <a:ln/>
         </p:spPr>
         <p:txBody>
-          <a:bodyPr wrap="square" lIns="0" tIns="0" rIns="0" bIns="0" rtlCol="0" anchor="t"/>
+          <a:bodyPr wrap="none" lIns="0" tIns="0" rIns="0" bIns="0" rtlCol="0" anchor="t"/>
           <a:lstStyle/>
           <a:p>
             <a:pPr algn="l" indent="0" marL="0">
@@ -2585,7 +2613,7 @@
           <a:ln/>
         </p:spPr>
         <p:txBody>
-          <a:bodyPr wrap="square" lIns="0" tIns="0" rIns="0" bIns="0" rtlCol="0" anchor="t"/>
+          <a:bodyPr wrap="none" lIns="0" tIns="0" rIns="0" bIns="0" rtlCol="0" anchor="t"/>
           <a:lstStyle/>
           <a:p>
             <a:pPr algn="l" indent="0" marL="0">
@@ -2631,6 +2659,10 @@
             <a:prstDash val="solid"/>
           </a:ln>
         </p:spPr>
+        <p:txBody>
+          <a:bodyPr/>
+          <a:p/>
+        </p:txBody>
       </p:sp>
       <p:sp>
         <p:nvSpPr>
@@ -2650,7 +2682,9 @@
           <a:ln/>
         </p:spPr>
         <p:txBody>
-          <a:bodyPr wrap="square" lIns="0" tIns="0" rIns="0" bIns="0" rtlCol="0" anchor="t"/>
+          <a:bodyPr wrap="square" lIns="0" tIns="0" rIns="0" bIns="0" rtlCol="0" anchor="t">
+            <a:normAutofit/>
+          </a:bodyPr>
           <a:lstStyle/>
           <a:p>
             <a:pPr algn="l" indent="0" marL="0">
@@ -2696,6 +2730,10 @@
             <a:prstDash val="solid"/>
           </a:ln>
         </p:spPr>
+        <p:txBody>
+          <a:bodyPr/>
+          <a:p/>
+        </p:txBody>
       </p:sp>
       <p:sp>
         <p:nvSpPr>
@@ -2715,7 +2753,9 @@
           <a:ln/>
         </p:spPr>
         <p:txBody>
-          <a:bodyPr wrap="square" lIns="0" tIns="0" rIns="0" bIns="0" rtlCol="0" anchor="t"/>
+          <a:bodyPr wrap="square" lIns="0" tIns="0" rIns="0" bIns="0" rtlCol="0" anchor="t">
+            <a:normAutofit/>
+          </a:bodyPr>
           <a:lstStyle/>
           <a:p>
             <a:pPr algn="l" indent="0" marL="0">
@@ -2761,6 +2801,10 @@
             <a:prstDash val="solid"/>
           </a:ln>
         </p:spPr>
+        <p:txBody>
+          <a:bodyPr/>
+          <a:p/>
+        </p:txBody>
       </p:sp>
       <p:sp>
         <p:nvSpPr>
@@ -2780,7 +2824,9 @@
           <a:ln/>
         </p:spPr>
         <p:txBody>
-          <a:bodyPr wrap="square" lIns="0" tIns="0" rIns="0" bIns="0" rtlCol="0" anchor="t"/>
+          <a:bodyPr wrap="square" lIns="0" tIns="0" rIns="0" bIns="0" rtlCol="0" anchor="t">
+            <a:normAutofit/>
+          </a:bodyPr>
           <a:lstStyle/>
           <a:p>
             <a:pPr algn="l" indent="0" marL="0">
@@ -2852,7 +2898,7 @@
           <a:ln/>
         </p:spPr>
         <p:txBody>
-          <a:bodyPr wrap="square" lIns="0" tIns="0" rIns="0" bIns="0" rtlCol="0" anchor="t"/>
+          <a:bodyPr wrap="none" lIns="0" tIns="0" rIns="0" bIns="0" rtlCol="0" anchor="t"/>
           <a:lstStyle/>
           <a:p>
             <a:pPr algn="l" indent="0" marL="0">
@@ -2894,7 +2940,7 @@
           <a:ln/>
         </p:spPr>
         <p:txBody>
-          <a:bodyPr wrap="square" lIns="0" tIns="0" rIns="0" bIns="0" rtlCol="0" anchor="t"/>
+          <a:bodyPr wrap="none" lIns="0" tIns="0" rIns="0" bIns="0" rtlCol="0" anchor="t"/>
           <a:lstStyle/>
           <a:p>
             <a:pPr algn="l" indent="0" marL="0">
@@ -2940,6 +2986,10 @@
             <a:prstDash val="solid"/>
           </a:ln>
         </p:spPr>
+        <p:txBody>
+          <a:bodyPr/>
+          <a:p/>
+        </p:txBody>
       </p:sp>
       <p:sp>
         <p:nvSpPr>
@@ -2959,7 +3009,9 @@
           <a:ln/>
         </p:spPr>
         <p:txBody>
-          <a:bodyPr wrap="square" lIns="0" tIns="0" rIns="0" bIns="0" rtlCol="0" anchor="t"/>
+          <a:bodyPr wrap="square" lIns="0" tIns="0" rIns="0" bIns="0" rtlCol="0" anchor="t">
+            <a:normAutofit/>
+          </a:bodyPr>
           <a:lstStyle/>
           <a:p>
             <a:pPr algn="l" indent="0" marL="0">
@@ -3005,6 +3057,10 @@
             <a:prstDash val="solid"/>
           </a:ln>
         </p:spPr>
+        <p:txBody>
+          <a:bodyPr/>
+          <a:p/>
+        </p:txBody>
       </p:sp>
       <p:sp>
         <p:nvSpPr>
@@ -3024,7 +3080,7 @@
           <a:ln/>
         </p:spPr>
         <p:txBody>
-          <a:bodyPr wrap="square" lIns="0" tIns="0" rIns="0" bIns="0" rtlCol="0" anchor="t"/>
+          <a:bodyPr wrap="none" lIns="0" tIns="0" rIns="0" bIns="0" rtlCol="0" anchor="t"/>
           <a:lstStyle/>
           <a:p>
             <a:pPr algn="l" indent="0" marL="0">
@@ -3070,6 +3126,10 @@
             <a:prstDash val="solid"/>
           </a:ln>
         </p:spPr>
+        <p:txBody>
+          <a:bodyPr/>
+          <a:p/>
+        </p:txBody>
       </p:sp>
       <p:sp>
         <p:nvSpPr>
@@ -3089,7 +3149,9 @@
           <a:ln/>
         </p:spPr>
         <p:txBody>
-          <a:bodyPr wrap="square" lIns="0" tIns="0" rIns="0" bIns="0" rtlCol="0" anchor="t"/>
+          <a:bodyPr wrap="square" lIns="0" tIns="0" rIns="0" bIns="0" rtlCol="0" anchor="t">
+            <a:normAutofit/>
+          </a:bodyPr>
           <a:lstStyle/>
           <a:p>
             <a:pPr algn="l" indent="0" marL="0">
@@ -3161,7 +3223,7 @@
           <a:ln/>
         </p:spPr>
         <p:txBody>
-          <a:bodyPr wrap="square" lIns="0" tIns="0" rIns="0" bIns="0" rtlCol="0" anchor="t"/>
+          <a:bodyPr wrap="none" lIns="0" tIns="0" rIns="0" bIns="0" rtlCol="0" anchor="t"/>
           <a:lstStyle/>
           <a:p>
             <a:pPr algn="l" indent="0" marL="0">
@@ -3235,7 +3297,7 @@
           <a:ln/>
         </p:spPr>
         <p:txBody>
-          <a:bodyPr wrap="square" lIns="0" tIns="0" rIns="0" bIns="0" rtlCol="0" anchor="t"/>
+          <a:bodyPr wrap="none" lIns="0" tIns="0" rIns="0" bIns="0" rtlCol="0" anchor="t"/>
           <a:lstStyle/>
           <a:p>
             <a:pPr algn="l" indent="0" marL="0">
@@ -3307,7 +3369,7 @@
           <a:ln/>
         </p:spPr>
         <p:txBody>
-          <a:bodyPr wrap="square" lIns="0" tIns="0" rIns="0" bIns="0" rtlCol="0" anchor="t"/>
+          <a:bodyPr wrap="none" lIns="0" tIns="0" rIns="0" bIns="0" rtlCol="0" anchor="t"/>
           <a:lstStyle/>
           <a:p>
             <a:pPr algn="l" indent="0" marL="0">
@@ -3349,7 +3411,7 @@
           <a:ln/>
         </p:spPr>
         <p:txBody>
-          <a:bodyPr wrap="square" lIns="0" tIns="0" rIns="0" bIns="0" rtlCol="0" anchor="t"/>
+          <a:bodyPr wrap="none" lIns="0" tIns="0" rIns="0" bIns="0" rtlCol="0" anchor="t"/>
           <a:lstStyle/>
           <a:p>
             <a:pPr algn="l" indent="0" marL="0">
@@ -3391,7 +3453,7 @@
           <a:ln/>
         </p:spPr>
         <p:txBody>
-          <a:bodyPr wrap="square" lIns="0" tIns="0" rIns="0" bIns="0" rtlCol="0" anchor="t"/>
+          <a:bodyPr wrap="none" lIns="0" tIns="0" rIns="0" bIns="0" rtlCol="0" anchor="t"/>
           <a:lstStyle/>
           <a:p>
             <a:pPr algn="l" indent="0" marL="0">
@@ -3433,7 +3495,9 @@
           <a:ln/>
         </p:spPr>
         <p:txBody>
-          <a:bodyPr wrap="square" lIns="0" tIns="0" rIns="0" bIns="0" rtlCol="0" anchor="t"/>
+          <a:bodyPr wrap="square" lIns="0" tIns="0" rIns="0" bIns="0" rtlCol="0" anchor="t">
+            <a:normAutofit/>
+          </a:bodyPr>
           <a:lstStyle/>
           <a:p>
             <a:pPr algn="r" indent="0" marL="0">
@@ -3475,7 +3539,9 @@
           <a:ln/>
         </p:spPr>
         <p:txBody>
-          <a:bodyPr wrap="square" lIns="0" tIns="0" rIns="0" bIns="0" rtlCol="0" anchor="t"/>
+          <a:bodyPr wrap="square" lIns="0" tIns="0" rIns="0" bIns="0" rtlCol="0" anchor="t">
+            <a:normAutofit/>
+          </a:bodyPr>
           <a:lstStyle/>
           <a:p>
             <a:pPr algn="r" indent="0" marL="0">
@@ -3547,7 +3613,7 @@
           <a:ln/>
         </p:spPr>
         <p:txBody>
-          <a:bodyPr wrap="square" lIns="0" tIns="0" rIns="0" bIns="0" rtlCol="0" anchor="t"/>
+          <a:bodyPr wrap="none" lIns="0" tIns="0" rIns="0" bIns="0" rtlCol="0" anchor="t"/>
           <a:lstStyle/>
           <a:p>
             <a:pPr algn="l" indent="0" marL="0">
@@ -3589,7 +3655,9 @@
           <a:ln/>
         </p:spPr>
         <p:txBody>
-          <a:bodyPr wrap="square" lIns="0" tIns="0" rIns="0" bIns="0" rtlCol="0" anchor="t"/>
+          <a:bodyPr wrap="square" lIns="0" tIns="0" rIns="0" bIns="0" rtlCol="0" anchor="t">
+            <a:normAutofit/>
+          </a:bodyPr>
           <a:lstStyle/>
           <a:p>
             <a:pPr algn="l" indent="0" marL="0">
@@ -3664,7 +3732,7 @@
           <a:ln/>
         </p:spPr>
         <p:txBody>
-          <a:bodyPr wrap="square" lIns="0" tIns="0" rIns="0" bIns="0" rtlCol="0" anchor="t"/>
+          <a:bodyPr wrap="none" lIns="0" tIns="0" rIns="0" bIns="0" rtlCol="0" anchor="t"/>
           <a:lstStyle/>
           <a:p>
             <a:pPr algn="l" indent="0" marL="0">
@@ -3706,7 +3774,9 @@
           <a:ln/>
         </p:spPr>
         <p:txBody>
-          <a:bodyPr wrap="square" lIns="0" tIns="0" rIns="0" bIns="0" rtlCol="0" anchor="t"/>
+          <a:bodyPr wrap="square" lIns="0" tIns="0" rIns="0" bIns="0" rtlCol="0" anchor="t">
+            <a:normAutofit/>
+          </a:bodyPr>
           <a:lstStyle/>
           <a:p>
             <a:pPr algn="l" indent="0" marL="0">
@@ -3781,7 +3851,7 @@
           <a:ln/>
         </p:spPr>
         <p:txBody>
-          <a:bodyPr wrap="square" lIns="0" tIns="0" rIns="0" bIns="0" rtlCol="0" anchor="t"/>
+          <a:bodyPr wrap="none" lIns="0" tIns="0" rIns="0" bIns="0" rtlCol="0" anchor="t"/>
           <a:lstStyle/>
           <a:p>
             <a:pPr algn="l" indent="0" marL="0">
@@ -3823,7 +3893,9 @@
           <a:ln/>
         </p:spPr>
         <p:txBody>
-          <a:bodyPr wrap="square" lIns="0" tIns="0" rIns="0" bIns="0" rtlCol="0" anchor="t"/>
+          <a:bodyPr wrap="square" lIns="0" tIns="0" rIns="0" bIns="0" rtlCol="0" anchor="t">
+            <a:normAutofit/>
+          </a:bodyPr>
           <a:lstStyle/>
           <a:p>
             <a:pPr algn="l" indent="0" marL="0">
@@ -3898,7 +3970,7 @@
           <a:ln/>
         </p:spPr>
         <p:txBody>
-          <a:bodyPr wrap="square" lIns="0" tIns="0" rIns="0" bIns="0" rtlCol="0" anchor="t"/>
+          <a:bodyPr wrap="none" lIns="0" tIns="0" rIns="0" bIns="0" rtlCol="0" anchor="t"/>
           <a:lstStyle/>
           <a:p>
             <a:pPr algn="l" indent="0" marL="0">
@@ -3940,7 +4012,9 @@
           <a:ln/>
         </p:spPr>
         <p:txBody>
-          <a:bodyPr wrap="square" lIns="0" tIns="0" rIns="0" bIns="0" rtlCol="0" anchor="t"/>
+          <a:bodyPr wrap="square" lIns="0" tIns="0" rIns="0" bIns="0" rtlCol="0" anchor="t">
+            <a:normAutofit/>
+          </a:bodyPr>
           <a:lstStyle/>
           <a:p>
             <a:pPr algn="l" indent="0" marL="0">
@@ -3985,7 +4059,7 @@
           <a:ln/>
         </p:spPr>
         <p:txBody>
-          <a:bodyPr wrap="square" lIns="0" tIns="0" rIns="0" bIns="0" rtlCol="0" anchor="t"/>
+          <a:bodyPr wrap="none" lIns="0" tIns="0" rIns="0" bIns="0" rtlCol="0" anchor="t"/>
           <a:lstStyle/>
           <a:p>
             <a:pPr algn="l" indent="0" marL="0">
@@ -4059,7 +4133,7 @@
           <a:ln/>
         </p:spPr>
         <p:txBody>
-          <a:bodyPr wrap="square" lIns="0" tIns="0" rIns="0" bIns="0" rtlCol="0" anchor="t"/>
+          <a:bodyPr wrap="none" lIns="0" tIns="0" rIns="0" bIns="0" rtlCol="0" anchor="t"/>
           <a:lstStyle/>
           <a:p>
             <a:pPr algn="l" indent="0" marL="0">
@@ -4131,7 +4205,7 @@
           <a:ln/>
         </p:spPr>
         <p:txBody>
-          <a:bodyPr wrap="square" lIns="0" tIns="0" rIns="0" bIns="0" rtlCol="0" anchor="t"/>
+          <a:bodyPr wrap="none" lIns="0" tIns="0" rIns="0" bIns="0" rtlCol="0" anchor="t"/>
           <a:lstStyle/>
           <a:p>
             <a:pPr algn="l" indent="0" marL="0">
@@ -4203,7 +4277,7 @@
           <a:ln/>
         </p:spPr>
         <p:txBody>
-          <a:bodyPr wrap="square" lIns="0" tIns="0" rIns="0" bIns="0" rtlCol="0" anchor="t"/>
+          <a:bodyPr wrap="none" lIns="0" tIns="0" rIns="0" bIns="0" rtlCol="0" anchor="t"/>
           <a:lstStyle/>
           <a:p>
             <a:pPr algn="l" indent="0" marL="0">
@@ -4245,7 +4319,7 @@
           <a:ln/>
         </p:spPr>
         <p:txBody>
-          <a:bodyPr wrap="square" lIns="0" tIns="0" rIns="0" bIns="0" rtlCol="0" anchor="t"/>
+          <a:bodyPr wrap="none" lIns="0" tIns="0" rIns="0" bIns="0" rtlCol="0" anchor="t"/>
           <a:lstStyle/>
           <a:p>
             <a:pPr algn="l" indent="0" marL="0">
@@ -4290,7 +4364,9 @@
           <a:ln/>
         </p:spPr>
         <p:txBody>
-          <a:bodyPr wrap="square" lIns="0" tIns="0" rIns="0" bIns="0" rtlCol="0" anchor="t"/>
+          <a:bodyPr wrap="square" lIns="0" tIns="0" rIns="0" bIns="0" rtlCol="0" anchor="t">
+            <a:normAutofit/>
+          </a:bodyPr>
           <a:lstStyle/>
           <a:p>
             <a:pPr algn="l" indent="0" marL="0">
@@ -4362,7 +4438,9 @@
           <a:ln/>
         </p:spPr>
         <p:txBody>
-          <a:bodyPr wrap="square" lIns="0" tIns="0" rIns="0" bIns="0" rtlCol="0" anchor="t"/>
+          <a:bodyPr wrap="square" lIns="0" tIns="0" rIns="0" bIns="0" rtlCol="0" anchor="t">
+            <a:normAutofit/>
+          </a:bodyPr>
           <a:lstStyle/>
           <a:p>
             <a:pPr algn="l" indent="0" marL="0">
@@ -4434,7 +4512,7 @@
           <a:ln/>
         </p:spPr>
         <p:txBody>
-          <a:bodyPr wrap="square" lIns="0" tIns="0" rIns="0" bIns="0" rtlCol="0" anchor="t"/>
+          <a:bodyPr wrap="none" lIns="0" tIns="0" rIns="0" bIns="0" rtlCol="0" anchor="t"/>
           <a:lstStyle/>
           <a:p>
             <a:pPr algn="l" indent="0" marL="0">
@@ -4476,7 +4554,7 @@
           <a:ln/>
         </p:spPr>
         <p:txBody>
-          <a:bodyPr wrap="square" lIns="0" tIns="0" rIns="0" bIns="0" rtlCol="0" anchor="t"/>
+          <a:bodyPr wrap="none" lIns="0" tIns="0" rIns="0" bIns="0" rtlCol="0" anchor="t"/>
           <a:lstStyle/>
           <a:p>
             <a:pPr algn="l" indent="0" marL="0">
@@ -4521,7 +4599,9 @@
           <a:ln/>
         </p:spPr>
         <p:txBody>
-          <a:bodyPr wrap="square" lIns="0" tIns="0" rIns="0" bIns="0" rtlCol="0" anchor="t"/>
+          <a:bodyPr wrap="square" lIns="0" tIns="0" rIns="0" bIns="0" rtlCol="0" anchor="t">
+            <a:normAutofit/>
+          </a:bodyPr>
           <a:lstStyle/>
           <a:p>
             <a:pPr algn="l" indent="0" marL="0">
@@ -4593,7 +4673,9 @@
           <a:ln/>
         </p:spPr>
         <p:txBody>
-          <a:bodyPr wrap="square" lIns="0" tIns="0" rIns="0" bIns="0" rtlCol="0" anchor="t"/>
+          <a:bodyPr wrap="square" lIns="0" tIns="0" rIns="0" bIns="0" rtlCol="0" anchor="t">
+            <a:normAutofit/>
+          </a:bodyPr>
           <a:lstStyle/>
           <a:p>
             <a:pPr algn="l" indent="0" marL="0">
@@ -4665,7 +4747,7 @@
           <a:ln/>
         </p:spPr>
         <p:txBody>
-          <a:bodyPr wrap="square" lIns="0" tIns="0" rIns="0" bIns="0" rtlCol="0" anchor="t"/>
+          <a:bodyPr wrap="none" lIns="0" tIns="0" rIns="0" bIns="0" rtlCol="0" anchor="t"/>
           <a:lstStyle/>
           <a:p>
             <a:pPr algn="l" indent="0" marL="0">
@@ -4707,7 +4789,7 @@
           <a:ln/>
         </p:spPr>
         <p:txBody>
-          <a:bodyPr wrap="square" lIns="0" tIns="0" rIns="0" bIns="0" rtlCol="0" anchor="t"/>
+          <a:bodyPr wrap="none" lIns="0" tIns="0" rIns="0" bIns="0" rtlCol="0" anchor="t"/>
           <a:lstStyle/>
           <a:p>
             <a:pPr algn="l" indent="0" marL="0">
@@ -4752,7 +4834,9 @@
           <a:ln/>
         </p:spPr>
         <p:txBody>
-          <a:bodyPr wrap="square" lIns="0" tIns="0" rIns="0" bIns="0" rtlCol="0" anchor="t"/>
+          <a:bodyPr wrap="square" lIns="0" tIns="0" rIns="0" bIns="0" rtlCol="0" anchor="t">
+            <a:normAutofit/>
+          </a:bodyPr>
           <a:lstStyle/>
           <a:p>
             <a:pPr algn="l" indent="0" marL="0">
@@ -4824,7 +4908,9 @@
           <a:ln/>
         </p:spPr>
         <p:txBody>
-          <a:bodyPr wrap="square" lIns="0" tIns="0" rIns="0" bIns="0" rtlCol="0" anchor="t"/>
+          <a:bodyPr wrap="square" lIns="0" tIns="0" rIns="0" bIns="0" rtlCol="0" anchor="t">
+            <a:normAutofit/>
+          </a:bodyPr>
           <a:lstStyle/>
           <a:p>
             <a:pPr algn="l" indent="0" marL="0">
@@ -4866,7 +4952,7 @@
           <a:ln/>
         </p:spPr>
         <p:txBody>
-          <a:bodyPr wrap="square" lIns="0" tIns="0" rIns="0" bIns="0" rtlCol="0" anchor="t"/>
+          <a:bodyPr wrap="none" lIns="0" tIns="0" rIns="0" bIns="0" rtlCol="0" anchor="t"/>
           <a:lstStyle/>
           <a:p>
             <a:pPr algn="l" indent="0" marL="0">
@@ -5000,7 +5086,9 @@
           <a:ln/>
         </p:spPr>
         <p:txBody>
-          <a:bodyPr wrap="square" lIns="0" tIns="0" rIns="0" bIns="0" rtlCol="0" anchor="t"/>
+          <a:bodyPr wrap="square" lIns="0" tIns="0" rIns="0" bIns="0" rtlCol="0" anchor="t">
+            <a:normAutofit/>
+          </a:bodyPr>
           <a:lstStyle/>
           <a:p>
             <a:pPr algn="l" indent="0" marL="0">
@@ -5042,7 +5130,7 @@
           <a:ln/>
         </p:spPr>
         <p:txBody>
-          <a:bodyPr wrap="square" lIns="0" tIns="0" rIns="0" bIns="0" rtlCol="0" anchor="t"/>
+          <a:bodyPr wrap="none" lIns="0" tIns="0" rIns="0" bIns="0" rtlCol="0" anchor="t"/>
           <a:lstStyle/>
           <a:p>
             <a:pPr algn="r" indent="0" marL="0">
@@ -5117,7 +5205,7 @@
           <a:ln/>
         </p:spPr>
         <p:txBody>
-          <a:bodyPr wrap="square" lIns="0" tIns="0" rIns="0" bIns="0" rtlCol="0" anchor="t"/>
+          <a:bodyPr wrap="none" lIns="0" tIns="0" rIns="0" bIns="0" rtlCol="0" anchor="t"/>
           <a:lstStyle/>
           <a:p>
             <a:pPr algn="l" indent="0" marL="0">
@@ -5162,7 +5250,7 @@
           <a:ln/>
         </p:spPr>
         <p:txBody>
-          <a:bodyPr wrap="square" lIns="0" tIns="0" rIns="0" bIns="0" rtlCol="0" anchor="t"/>
+          <a:bodyPr wrap="none" lIns="0" tIns="0" rIns="0" bIns="0" rtlCol="0" anchor="t"/>
           <a:lstStyle/>
           <a:p>
             <a:pPr algn="l" indent="0" marL="0">
@@ -5207,7 +5295,9 @@
           <a:ln/>
         </p:spPr>
         <p:txBody>
-          <a:bodyPr wrap="square" lIns="0" tIns="0" rIns="0" bIns="0" rtlCol="0" anchor="t"/>
+          <a:bodyPr wrap="square" lIns="0" tIns="0" rIns="0" bIns="0" rtlCol="0" anchor="t">
+            <a:normAutofit/>
+          </a:bodyPr>
           <a:lstStyle/>
           <a:p>
             <a:pPr algn="l" indent="0" marL="0">
@@ -5282,7 +5372,7 @@
           <a:ln/>
         </p:spPr>
         <p:txBody>
-          <a:bodyPr wrap="square" lIns="0" tIns="0" rIns="0" bIns="0" rtlCol="0" anchor="t"/>
+          <a:bodyPr wrap="none" lIns="0" tIns="0" rIns="0" bIns="0" rtlCol="0" anchor="t"/>
           <a:lstStyle/>
           <a:p>
             <a:pPr algn="l" indent="0" marL="0">
@@ -5327,7 +5417,7 @@
           <a:ln/>
         </p:spPr>
         <p:txBody>
-          <a:bodyPr wrap="square" lIns="0" tIns="0" rIns="0" bIns="0" rtlCol="0" anchor="t"/>
+          <a:bodyPr wrap="none" lIns="0" tIns="0" rIns="0" bIns="0" rtlCol="0" anchor="t"/>
           <a:lstStyle/>
           <a:p>
             <a:pPr algn="l" indent="0" marL="0">
@@ -5372,7 +5462,9 @@
           <a:ln/>
         </p:spPr>
         <p:txBody>
-          <a:bodyPr wrap="square" lIns="0" tIns="0" rIns="0" bIns="0" rtlCol="0" anchor="t"/>
+          <a:bodyPr wrap="square" lIns="0" tIns="0" rIns="0" bIns="0" rtlCol="0" anchor="t">
+            <a:normAutofit/>
+          </a:bodyPr>
           <a:lstStyle/>
           <a:p>
             <a:pPr algn="l" indent="0" marL="0">
@@ -5447,7 +5539,7 @@
           <a:ln/>
         </p:spPr>
         <p:txBody>
-          <a:bodyPr wrap="square" lIns="0" tIns="0" rIns="0" bIns="0" rtlCol="0" anchor="t"/>
+          <a:bodyPr wrap="none" lIns="0" tIns="0" rIns="0" bIns="0" rtlCol="0" anchor="t"/>
           <a:lstStyle/>
           <a:p>
             <a:pPr algn="l" indent="0" marL="0">
@@ -5492,7 +5584,7 @@
           <a:ln/>
         </p:spPr>
         <p:txBody>
-          <a:bodyPr wrap="square" lIns="0" tIns="0" rIns="0" bIns="0" rtlCol="0" anchor="t"/>
+          <a:bodyPr wrap="none" lIns="0" tIns="0" rIns="0" bIns="0" rtlCol="0" anchor="t"/>
           <a:lstStyle/>
           <a:p>
             <a:pPr algn="l" indent="0" marL="0">
@@ -5537,7 +5629,9 @@
           <a:ln/>
         </p:spPr>
         <p:txBody>
-          <a:bodyPr wrap="square" lIns="0" tIns="0" rIns="0" bIns="0" rtlCol="0" anchor="t"/>
+          <a:bodyPr wrap="square" lIns="0" tIns="0" rIns="0" bIns="0" rtlCol="0" anchor="t">
+            <a:normAutofit/>
+          </a:bodyPr>
           <a:lstStyle/>
           <a:p>
             <a:pPr algn="l" indent="0" marL="0">

--- a/decks/deployment-strategies/deployment-strategies.pptx
+++ b/decks/deployment-strategies/deployment-strategies.pptx
@@ -1321,9 +1321,7 @@
           <a:ln/>
         </p:spPr>
         <p:txBody>
-          <a:bodyPr wrap="square" lIns="0" tIns="0" rIns="0" bIns="0" rtlCol="0" anchor="t">
-            <a:normAutofit/>
-          </a:bodyPr>
+          <a:bodyPr wrap="none" lIns="0" tIns="0" rIns="0" bIns="0" rtlCol="0" anchor="t"/>
           <a:lstStyle/>
           <a:p>
             <a:pPr algn="l" indent="0" marL="0">
@@ -3223,7 +3221,9 @@
           <a:ln/>
         </p:spPr>
         <p:txBody>
-          <a:bodyPr wrap="none" lIns="0" tIns="0" rIns="0" bIns="0" rtlCol="0" anchor="t"/>
+          <a:bodyPr wrap="square" lIns="0" tIns="0" rIns="0" bIns="0" rtlCol="0" anchor="t">
+            <a:normAutofit/>
+          </a:bodyPr>
           <a:lstStyle/>
           <a:p>
             <a:pPr algn="l" indent="0" marL="0">
